--- a/10-Knowledge-Products/KP1-GEA/videos/module_4/en/decks/KP1_M4_4.3_Deck_v0.2.pptx
+++ b/10-Knowledge-Products/KP1-GEA/videos/module_4/en/decks/KP1_M4_4.3_Deck_v0.2.pptx
@@ -14,14 +14,14 @@
     <p:handoutMasterId r:id="rId47"/>
   </p:handoutMasterIdLst>
   <p:sldIdLst>
-    <p:sldId id="2681" r:id="rId8"/>
-    <p:sldId id="2710" r:id="rId32"/>
-    <p:sldId id="2711" r:id="rId33"/>
     <p:sldId id="2712" r:id="rId34"/>
     <p:sldId id="2713" r:id="rId35"/>
     <p:sldId id="2714" r:id="rId36"/>
     <p:sldId id="2715" r:id="rId37"/>
     <p:sldId id="2716" r:id="rId38"/>
+    <p:sldId id="2717" r:id="rId39"/>
+    <p:sldId id="2718" r:id="rId40"/>
+    <p:sldId id="2719" r:id="rId41"/>
   </p:sldIdLst>
   <p:sldSz cx="12192000" cy="6858000"/>
   <p:notesSz cx="6858000" cy="9144000"/>
@@ -933,159 +933,13 @@
           <a:lstStyle/>
           <a:p>
             <a:r>
-              <a:t>PRACTICE BOX (on-screen only — never read it, never paraphrase it, never point at it). It replaces the narrated handoff: this video ends on the recap and the Sources slide.</a:t>
+              <a:t>VO: Four gaps surface. Duplicate registries — three learner lists where there should be one. Identity not consumed — education re-enters identity on paper instead of using the Identity Authority. No shared data exchange — every link is a custom point-to-point connection or a paper form. And no clear owner — everyone uses 'the learner', nobody is accountable for the authoritative copy.</a:t>
             </a:r>
           </a:p>
           <a:p/>
           <a:p>
             <a:r>
-              <a:t>VO: That is Phase 2 on Progressa. Score the capabilities. Name the four gaps. Rank by impact where movement is possible. Sign it off as honest ground truth — including the uncomfortable one.</a:t>
-            </a:r>
-          </a:p>
-        </p:txBody>
-      </p:sp>
-      <p:sp>
-        <p:nvSpPr>
-          <p:cNvPr id="4" name="Slide Number Placeholder 3"/>
-          <p:cNvSpPr>
-            <a:spLocks noGrp="1"/>
-          </p:cNvSpPr>
-          <p:nvPr>
-            <p:ph type="sldNum" idx="5" sz="quarter"/>
-          </p:nvPr>
-        </p:nvSpPr>
-        <p:spPr/>
-      </p:sp>
-    </p:spTree>
-  </p:cSld>
-  <p:clrMapOvr>
-    <a:masterClrMapping/>
-  </p:clrMapOvr>
-</p:notes>
-</file>
-
-<file path=ppt/notesSlides/notesSlide17.xml><?xml version="1.0" encoding="utf-8"?>
-<p:notes xmlns:a="http://schemas.openxmlformats.org/drawingml/2006/main" xmlns:p="http://schemas.openxmlformats.org/presentationml/2006/main" xmlns:r="http://schemas.openxmlformats.org/officeDocument/2006/relationships">
-  <p:cSld>
-    <p:spTree>
-      <p:nvGrpSpPr>
-        <p:cNvPr id="1" name=""/>
-        <p:cNvGrpSpPr/>
-        <p:nvPr/>
-      </p:nvGrpSpPr>
-      <p:grpSpPr>
-        <a:xfrm>
-          <a:off x="0" y="0"/>
-          <a:ext cx="0" cy="0"/>
-          <a:chOff x="0" y="0"/>
-          <a:chExt cx="0" cy="0"/>
-        </a:xfrm>
-      </p:grpSpPr>
-      <p:sp>
-        <p:nvSpPr>
-          <p:cNvPr id="2" name="Slide Image Placeholder 1"/>
-          <p:cNvSpPr>
-            <a:spLocks noGrp="1"/>
-          </p:cNvSpPr>
-          <p:nvPr>
-            <p:ph type="sldImg" idx="2"/>
-          </p:nvPr>
-        </p:nvSpPr>
-        <p:spPr/>
-      </p:sp>
-      <p:sp>
-        <p:nvSpPr>
-          <p:cNvPr id="3" name="Notes Placeholder 2"/>
-          <p:cNvSpPr>
-            <a:spLocks noGrp="1"/>
-          </p:cNvSpPr>
-          <p:nvPr>
-            <p:ph type="body" idx="3" sz="quarter"/>
-          </p:nvPr>
-        </p:nvSpPr>
-        <p:spPr/>
-        <p:txBody>
-          <a:bodyPr/>
-          <a:lstStyle/>
-          <a:p>
-            <a:r>
-              <a:t>VO, slide 1: Phase two is Assess. Now you judge: what is the gap between where Progressa is and where it needs to be? The deliverable is the current state in four layers, maturity scorecards, and a gap analysis that ranks the problems. About six to eight weeks.</a:t>
-            </a:r>
-          </a:p>
-          <a:p/>
-          <a:p>
-            <a:r>
-              <a:t>Retrieval prompt — ask before playing on: in your own sector, name the gaps you would expect a first assessment to find. Hold your list. The four Progressa surfaces are two slides from now.</a:t>
-            </a:r>
-          </a:p>
-        </p:txBody>
-      </p:sp>
-      <p:sp>
-        <p:nvSpPr>
-          <p:cNvPr id="4" name="Slide Number Placeholder 3"/>
-          <p:cNvSpPr>
-            <a:spLocks noGrp="1"/>
-          </p:cNvSpPr>
-          <p:nvPr>
-            <p:ph type="sldNum" idx="5" sz="quarter"/>
-          </p:nvPr>
-        </p:nvSpPr>
-        <p:spPr/>
-      </p:sp>
-    </p:spTree>
-  </p:cSld>
-  <p:clrMapOvr>
-    <a:masterClrMapping/>
-  </p:clrMapOvr>
-</p:notes>
-</file>
-
-<file path=ppt/notesSlides/notesSlide18.xml><?xml version="1.0" encoding="utf-8"?>
-<p:notes xmlns:a="http://schemas.openxmlformats.org/drawingml/2006/main" xmlns:p="http://schemas.openxmlformats.org/presentationml/2006/main" xmlns:r="http://schemas.openxmlformats.org/officeDocument/2006/relationships">
-  <p:cSld>
-    <p:spTree>
-      <p:nvGrpSpPr>
-        <p:cNvPr id="1" name=""/>
-        <p:cNvGrpSpPr/>
-        <p:nvPr/>
-      </p:nvGrpSpPr>
-      <p:grpSpPr>
-        <a:xfrm>
-          <a:off x="0" y="0"/>
-          <a:ext cx="0" cy="0"/>
-          <a:chOff x="0" y="0"/>
-          <a:chExt cx="0" cy="0"/>
-        </a:xfrm>
-      </p:grpSpPr>
-      <p:sp>
-        <p:nvSpPr>
-          <p:cNvPr id="2" name="Slide Image Placeholder 1"/>
-          <p:cNvSpPr>
-            <a:spLocks noGrp="1"/>
-          </p:cNvSpPr>
-          <p:nvPr>
-            <p:ph type="sldImg" idx="2"/>
-          </p:nvPr>
-        </p:nvSpPr>
-        <p:spPr/>
-      </p:sp>
-      <p:sp>
-        <p:nvSpPr>
-          <p:cNvPr id="3" name="Notes Placeholder 2"/>
-          <p:cNvSpPr>
-            <a:spLocks noGrp="1"/>
-          </p:cNvSpPr>
-          <p:nvPr>
-            <p:ph type="body" idx="3" sz="quarter"/>
-          </p:nvPr>
-        </p:nvSpPr>
-        <p:spPr/>
-        <p:txBody>
-          <a:bodyPr/>
-          <a:lstStyle/>
-          <a:p>
-            <a:r>
-              <a:t>VO: Start by scoring Progressa's capabilities against PAERA-anchored standards. Register a learner: low maturity — three lists, none authoritative. Prove identity: medium — the Identity Authority exists but education does not consume it. Certify a result: high — the Examination Authority does this well. Share data across bodies: very low — almost everything is paper. A simple maturity score per capability turns a vague sense that things are bad into a picture of exactly where the sector is weak and where it is strong.</a:t>
+              <a:t>Production cue: this slide answers the retrieval prompt set on the title slide. Give the viewer a beat to compare their list against these four before moving on.</a:t>
             </a:r>
           </a:p>
         </p:txBody>
@@ -1155,13 +1009,7 @@
           <a:lstStyle/>
           <a:p>
             <a:r>
-              <a:t>VO: Four gaps surface. Duplicate registries — three learner lists where there should be one. Identity not consumed — education re-enters identity on paper instead of using the Identity Authority. No shared data exchange — every link is a custom point-to-point connection or a paper form. And no clear owner — everyone uses 'the learner', nobody is accountable for the authoritative copy.</a:t>
-            </a:r>
-          </a:p>
-          <a:p/>
-          <a:p>
-            <a:r>
-              <a:t>Production cue: this slide answers the retrieval prompt set on the title slide. Give the viewer a beat to compare their list against these four before moving on.</a:t>
+              <a:t>Title card — the cold open. The hosts name the module, the video number, the title and the single message on this slide; no scripted narration. Hold until the opener begins; the opener is narrated on the next slide.</a:t>
             </a:r>
           </a:p>
         </p:txBody>
@@ -1231,7 +1079,7 @@
           <a:lstStyle/>
           <a:p>
             <a:r>
-              <a:t>VO: Assess ends with the second sign-off: the gap analysis reflects ground truth. On Progressa that has a cost. One of the three learner lists is owned by a powerful programme that does not want to give it up. An assessment that softens that gap to avoid the fight fails — quietly, a year later, when the single learner record still does not exist.</a:t>
+              <a:t>VO: Start by scoring Progressa's capabilities against PAERA-anchored standards. Register a learner: low maturity — three lists, none authoritative. Prove identity: medium — the Identity Authority exists but education does not consume it. Certify a result: high — the Examination Authority does this well. Share data across bodies: very low — almost everything is paper. A simple maturity score per capability turns a vague sense that things are bad into a picture of exactly where the sector is weak and where it is strong.</a:t>
             </a:r>
           </a:p>
         </p:txBody>
@@ -1301,7 +1149,13 @@
           <a:lstStyle/>
           <a:p>
             <a:r>
-              <a:t>VO: On Progressa the duplicate learner registry tops the list. It is the direct cause of the minister's stalled single-learner-record promise, it burdens every parent, and it is closable by making the Learner Registry authoritative and having the others consume it. The no-data-exchange gap is high impact but harder, so it sequences later.</a:t>
+              <a:t>VO: Phase two is Assess. Now you judge: what is the gap between where Progressa is and where it needs to be? The deliverable is the current state in four layers, maturity scorecards, and a gap analysis that ranks the problems. About six to eight weeks.</a:t>
+            </a:r>
+          </a:p>
+          <a:p/>
+          <a:p>
+            <a:r>
+              <a:t>Retrieval prompt — ask before playing on: in your own sector, name the gaps you would expect a first assessment to find. Hold your list. The four Progressa surfaces are two slides from now.</a:t>
             </a:r>
           </a:p>
         </p:txBody>
@@ -1326,7 +1180,7 @@
 </p:notes>
 </file>
 
-<file path=ppt/notesSlides/notesSlide21.xml><?xml version="1.0" encoding="utf-8"?>
+<file path=ppt/notesSlides/notesSlide23.xml><?xml version="1.0" encoding="utf-8"?>
 <p:notes xmlns:a="http://schemas.openxmlformats.org/drawingml/2006/main" xmlns:p="http://schemas.openxmlformats.org/presentationml/2006/main" xmlns:r="http://schemas.openxmlformats.org/officeDocument/2006/relationships">
   <p:cSld>
     <p:spTree>
@@ -1371,7 +1225,7 @@
           <a:lstStyle/>
           <a:p>
             <a:r>
-              <a:t>Title card for standalone video 4.3. Content slides are identical to the corresponding section of the combined deck KP1_M4_Deck_v0.2.pptx; voice-over is in each slide’s notes.</a:t>
+              <a:t>VO: On Progressa the duplicate learner registry tops the list. It is the direct cause of the minister's stalled single-learner-record promise, it burdens every parent, and it is closable by making the Learner Registry authoritative and having the others consume it. The no-data-exchange gap is high impact but harder, so it sequences later.</a:t>
             </a:r>
           </a:p>
         </p:txBody>
@@ -1396,7 +1250,153 @@
 </p:notes>
 </file>
 
-<file path=ppt/notesSlides/notesSlide23.xml><?xml version="1.0" encoding="utf-8"?>
+<file path=ppt/notesSlides/notesSlide24.xml><?xml version="1.0" encoding="utf-8"?>
+<p:notes xmlns:a="http://schemas.openxmlformats.org/drawingml/2006/main" xmlns:p="http://schemas.openxmlformats.org/presentationml/2006/main" xmlns:r="http://schemas.openxmlformats.org/officeDocument/2006/relationships">
+  <p:cSld>
+    <p:spTree>
+      <p:nvGrpSpPr>
+        <p:cNvPr id="1" name=""/>
+        <p:cNvGrpSpPr/>
+        <p:nvPr/>
+      </p:nvGrpSpPr>
+      <p:grpSpPr>
+        <a:xfrm>
+          <a:off x="0" y="0"/>
+          <a:ext cx="0" cy="0"/>
+          <a:chOff x="0" y="0"/>
+          <a:chExt cx="0" cy="0"/>
+        </a:xfrm>
+      </p:grpSpPr>
+      <p:sp>
+        <p:nvSpPr>
+          <p:cNvPr id="2" name="Slide Image Placeholder 1"/>
+          <p:cNvSpPr>
+            <a:spLocks noGrp="1"/>
+          </p:cNvSpPr>
+          <p:nvPr>
+            <p:ph type="sldImg" idx="2"/>
+          </p:nvPr>
+        </p:nvSpPr>
+        <p:spPr/>
+      </p:sp>
+      <p:sp>
+        <p:nvSpPr>
+          <p:cNvPr id="3" name="Notes Placeholder 2"/>
+          <p:cNvSpPr>
+            <a:spLocks noGrp="1"/>
+          </p:cNvSpPr>
+          <p:nvPr>
+            <p:ph type="body" idx="3" sz="quarter"/>
+          </p:nvPr>
+        </p:nvSpPr>
+        <p:spPr/>
+        <p:txBody>
+          <a:bodyPr/>
+          <a:lstStyle/>
+          <a:p>
+            <a:r>
+              <a:t>VO: Assess ends with the second sign-off: the gap analysis reflects ground truth. On Progressa that has a cost. One of the three learner lists is owned by a powerful programme that does not want to give it up. An assessment that softens that gap to avoid the fight fails — quietly, a year later, when the single learner record still does not exist.</a:t>
+            </a:r>
+          </a:p>
+        </p:txBody>
+      </p:sp>
+      <p:sp>
+        <p:nvSpPr>
+          <p:cNvPr id="4" name="Slide Number Placeholder 3"/>
+          <p:cNvSpPr>
+            <a:spLocks noGrp="1"/>
+          </p:cNvSpPr>
+          <p:nvPr>
+            <p:ph type="sldNum" idx="5" sz="quarter"/>
+          </p:nvPr>
+        </p:nvSpPr>
+        <p:spPr/>
+      </p:sp>
+    </p:spTree>
+  </p:cSld>
+  <p:clrMapOvr>
+    <a:masterClrMapping/>
+  </p:clrMapOvr>
+</p:notes>
+</file>
+
+<file path=ppt/notesSlides/notesSlide25.xml><?xml version="1.0" encoding="utf-8"?>
+<p:notes xmlns:a="http://schemas.openxmlformats.org/drawingml/2006/main" xmlns:p="http://schemas.openxmlformats.org/presentationml/2006/main" xmlns:r="http://schemas.openxmlformats.org/officeDocument/2006/relationships">
+  <p:cSld>
+    <p:spTree>
+      <p:nvGrpSpPr>
+        <p:cNvPr id="1" name=""/>
+        <p:cNvGrpSpPr/>
+        <p:nvPr/>
+      </p:nvGrpSpPr>
+      <p:grpSpPr>
+        <a:xfrm>
+          <a:off x="0" y="0"/>
+          <a:ext cx="0" cy="0"/>
+          <a:chOff x="0" y="0"/>
+          <a:chExt cx="0" cy="0"/>
+        </a:xfrm>
+      </p:grpSpPr>
+      <p:sp>
+        <p:nvSpPr>
+          <p:cNvPr id="2" name="Slide Image Placeholder 1"/>
+          <p:cNvSpPr>
+            <a:spLocks noGrp="1"/>
+          </p:cNvSpPr>
+          <p:nvPr>
+            <p:ph type="sldImg" idx="2"/>
+          </p:nvPr>
+        </p:nvSpPr>
+        <p:spPr/>
+      </p:sp>
+      <p:sp>
+        <p:nvSpPr>
+          <p:cNvPr id="3" name="Notes Placeholder 2"/>
+          <p:cNvSpPr>
+            <a:spLocks noGrp="1"/>
+          </p:cNvSpPr>
+          <p:nvPr>
+            <p:ph type="body" idx="3" sz="quarter"/>
+          </p:nvPr>
+        </p:nvSpPr>
+        <p:spPr/>
+        <p:txBody>
+          <a:bodyPr/>
+          <a:lstStyle/>
+          <a:p>
+            <a:r>
+              <a:t>PRACTICE BOX (on-screen only — never read it, never paraphrase it, never point at it). It replaces the narrated handoff: this video ends on the recap and the Sources slide.</a:t>
+            </a:r>
+          </a:p>
+          <a:p/>
+          <a:p>
+            <a:r>
+              <a:t>VO: That is Phase 2 on Progressa. Score the capabilities. Name the four gaps. Rank by impact where movement is possible. Sign it off as honest ground truth — including the uncomfortable one.</a:t>
+            </a:r>
+          </a:p>
+        </p:txBody>
+      </p:sp>
+      <p:sp>
+        <p:nvSpPr>
+          <p:cNvPr id="4" name="Slide Number Placeholder 3"/>
+          <p:cNvSpPr>
+            <a:spLocks noGrp="1"/>
+          </p:cNvSpPr>
+          <p:nvPr>
+            <p:ph type="sldNum" idx="5" sz="quarter"/>
+          </p:nvPr>
+        </p:nvSpPr>
+        <p:spPr/>
+      </p:sp>
+    </p:spTree>
+  </p:cSld>
+  <p:clrMapOvr>
+    <a:masterClrMapping/>
+  </p:clrMapOvr>
+</p:notes>
+</file>
+
+<file path=ppt/notesSlides/notesSlide26.xml><?xml version="1.0" encoding="utf-8"?>
 <p:notes xmlns:a="http://schemas.openxmlformats.org/drawingml/2006/main" xmlns:p="http://schemas.openxmlformats.org/presentationml/2006/main" xmlns:r="http://schemas.openxmlformats.org/officeDocument/2006/relationships">
   <p:cSld>
     <p:spTree>
@@ -11602,1634 +11602,6 @@
 </p:sldMaster>
 </file>
 
-<file path=ppt/slides/slide1.xml><?xml version="1.0" encoding="utf-8"?>
-<p:sld xmlns:a="http://schemas.openxmlformats.org/drawingml/2006/main" xmlns:r="http://schemas.openxmlformats.org/officeDocument/2006/relationships" xmlns:p="http://schemas.openxmlformats.org/presentationml/2006/main">
-  <p:cSld>
-    <p:spTree>
-      <p:nvGrpSpPr>
-        <p:cNvPr id="1" name=""/>
-        <p:cNvGrpSpPr/>
-        <p:nvPr/>
-      </p:nvGrpSpPr>
-      <p:grpSpPr>
-        <a:xfrm>
-          <a:off x="0" y="0"/>
-          <a:ext cx="0" cy="0"/>
-          <a:chOff x="0" y="0"/>
-          <a:chExt cx="0" cy="0"/>
-        </a:xfrm>
-      </p:grpSpPr>
-      <p:cxnSp>
-        <p:nvCxnSpPr>
-          <p:cNvPr id="11" name="Straight Connector 10">
-            <a:extLst>
-              <a:ext uri="{FF2B5EF4-FFF2-40B4-BE49-F238E27FC236}">
-                <a16:creationId xmlns:a16="http://schemas.microsoft.com/office/drawing/2014/main" id="{D9AD66F2-F7C0-4D03-9150-D28F17AC561D}"/>
-              </a:ext>
-            </a:extLst>
-          </p:cNvPr>
-          <p:cNvCxnSpPr>
-            <a:cxnSpLocks/>
-          </p:cNvCxnSpPr>
-          <p:nvPr/>
-        </p:nvCxnSpPr>
-        <p:spPr>
-          <a:xfrm>
-            <a:off x="373021" y="2198718"/>
-            <a:ext cx="6843567" cy="0"/>
-          </a:xfrm>
-          <a:prstGeom prst="line">
-            <a:avLst/>
-          </a:prstGeom>
-          <a:ln w="12700">
-            <a:solidFill>
-              <a:srgbClr val="009CD6"/>
-            </a:solidFill>
-          </a:ln>
-        </p:spPr>
-        <p:style>
-          <a:lnRef idx="1">
-            <a:schemeClr val="accent1"/>
-          </a:lnRef>
-          <a:fillRef idx="0">
-            <a:schemeClr val="accent1"/>
-          </a:fillRef>
-          <a:effectRef idx="0">
-            <a:schemeClr val="accent1"/>
-          </a:effectRef>
-          <a:fontRef idx="minor">
-            <a:schemeClr val="tx1"/>
-          </a:fontRef>
-        </p:style>
-      </p:cxnSp>
-      <p:sp>
-        <p:nvSpPr>
-          <p:cNvPr id="12" name="Title 9">
-            <a:extLst>
-              <a:ext uri="{FF2B5EF4-FFF2-40B4-BE49-F238E27FC236}">
-                <a16:creationId xmlns:a16="http://schemas.microsoft.com/office/drawing/2014/main" id="{EEB08032-CE0E-4986-AEDF-A41026C0E8B9}"/>
-              </a:ext>
-            </a:extLst>
-          </p:cNvPr>
-          <p:cNvSpPr txBox="1">
-            <a:spLocks/>
-          </p:cNvSpPr>
-          <p:nvPr/>
-        </p:nvSpPr>
-        <p:spPr>
-          <a:xfrm>
-            <a:off x="237734" y="702833"/>
-            <a:ext cx="6432007" cy="1218817"/>
-          </a:xfrm>
-          <a:prstGeom prst="rect">
-            <a:avLst/>
-          </a:prstGeom>
-        </p:spPr>
-        <p:txBody>
-          <a:bodyPr anchor="b">
-            <a:noAutofit/>
-          </a:bodyPr>
-          <a:lstStyle>
-            <a:lvl1pPr algn="l" defTabSz="914400" rtl="0" eaLnBrk="1" latinLnBrk="0" hangingPunct="1">
-              <a:lnSpc>
-                <a:spcPct val="90000"/>
-              </a:lnSpc>
-              <a:spcBef>
-                <a:spcPct val="0"/>
-              </a:spcBef>
-              <a:buNone/>
-              <a:defRPr sz="4000" kern="1200">
-                <a:solidFill>
-                  <a:schemeClr val="bg1"/>
-                </a:solidFill>
-                <a:latin typeface="Arial" panose="020B0604020202020204" pitchFamily="34" charset="0"/>
-                <a:ea typeface="+mj-ea"/>
-                <a:cs typeface="Arial" panose="020B0604020202020204" pitchFamily="34" charset="0"/>
-              </a:defRPr>
-            </a:lvl1pPr>
-          </a:lstStyle>
-          <a:p>
-            <a:r>
-              <a:rPr sz="2400" b="1" i="0">
-                <a:solidFill>
-                  <a:srgbClr val="1A1A1A"/>
-                </a:solidFill>
-                <a:latin typeface="Arial"/>
-              </a:rPr>
-              <a:t>4.3 — Phase 2, Assess — find the gaps and rank them</a:t>
-            </a:r>
-          </a:p>
-        </p:txBody>
-      </p:sp>
-      <p:pic>
-        <p:nvPicPr>
-          <p:cNvPr id="7" name="Picture 6">
-            <a:extLst>
-              <a:ext uri="{FF2B5EF4-FFF2-40B4-BE49-F238E27FC236}">
-                <a16:creationId xmlns:a16="http://schemas.microsoft.com/office/drawing/2014/main" id="{A2066351-C569-4C4C-A096-308777FCDC32}"/>
-              </a:ext>
-            </a:extLst>
-          </p:cNvPr>
-          <p:cNvPicPr>
-            <a:picLocks noChangeAspect="1"/>
-          </p:cNvPicPr>
-          <p:nvPr/>
-        </p:nvPicPr>
-        <p:blipFill>
-          <a:blip r:embed="rId2">
-            <a:extLst>
-              <a:ext uri="{28A0092B-C50C-407E-A947-70E740481C1C}">
-                <a14:useLocalDpi xmlns:a14="http://schemas.microsoft.com/office/drawing/2010/main" val="0"/>
-              </a:ext>
-            </a:extLst>
-          </a:blip>
-          <a:srcRect t="20219" b="14729"/>
-          <a:stretch>
-            <a:fillRect/>
-          </a:stretch>
-        </p:blipFill>
-        <p:spPr>
-          <a:xfrm>
-            <a:off x="0" y="5620871"/>
-            <a:ext cx="1323975" cy="1218816"/>
-          </a:xfrm>
-          <a:prstGeom prst="rect">
-            <a:avLst/>
-          </a:prstGeom>
-        </p:spPr>
-      </p:pic>
-      <p:sp>
-        <p:nvSpPr>
-          <p:cNvPr id="14" name="Title 9">
-            <a:extLst>
-              <a:ext uri="{FF2B5EF4-FFF2-40B4-BE49-F238E27FC236}">
-                <a16:creationId xmlns:a16="http://schemas.microsoft.com/office/drawing/2014/main" id="{B5087B80-3EE4-1881-0130-ED58CA625092}"/>
-              </a:ext>
-            </a:extLst>
-          </p:cNvPr>
-          <p:cNvSpPr txBox="1">
-            <a:spLocks/>
-          </p:cNvSpPr>
-          <p:nvPr/>
-        </p:nvSpPr>
-        <p:spPr>
-          <a:xfrm>
-            <a:off x="284452" y="2475786"/>
-            <a:ext cx="6382893" cy="953213"/>
-          </a:xfrm>
-          <a:prstGeom prst="rect">
-            <a:avLst/>
-          </a:prstGeom>
-        </p:spPr>
-        <p:txBody>
-          <a:bodyPr anchor="t">
-            <a:noAutofit/>
-          </a:bodyPr>
-          <a:lstStyle>
-            <a:lvl1pPr algn="l" defTabSz="914400" rtl="0" eaLnBrk="1" latinLnBrk="0" hangingPunct="1">
-              <a:lnSpc>
-                <a:spcPct val="90000"/>
-              </a:lnSpc>
-              <a:spcBef>
-                <a:spcPct val="0"/>
-              </a:spcBef>
-              <a:buNone/>
-              <a:defRPr sz="4000" kern="1200">
-                <a:solidFill>
-                  <a:schemeClr val="bg1"/>
-                </a:solidFill>
-                <a:latin typeface="Arial" panose="020B0604020202020204" pitchFamily="34" charset="0"/>
-                <a:ea typeface="+mj-ea"/>
-                <a:cs typeface="Arial" panose="020B0604020202020204" pitchFamily="34" charset="0"/>
-              </a:defRPr>
-            </a:lvl1pPr>
-          </a:lstStyle>
-          <a:p>
-            <a:pPr marL="0" marR="0" lvl="0" indent="0" rtl="0">
-              <a:spcBef>
-                <a:spcPts val="600"/>
-              </a:spcBef>
-              <a:spcAft>
-                <a:spcPts val="0"/>
-              </a:spcAft>
-              <a:buNone/>
-            </a:pPr>
-            <a:r>
-              <a:rPr sz="1300" b="1" i="0">
-                <a:solidFill>
-                  <a:srgbClr val="006E96"/>
-                </a:solidFill>
-                <a:latin typeface="Arial"/>
-              </a:rPr>
-              <a:t>KP1 · Government Enterprise Architecture · Module 4 · Video 4.3</a:t>
-            </a:r>
-          </a:p>
-          <a:p>
-            <a:r>
-              <a:rPr sz="1200" b="0" i="1">
-                <a:solidFill>
-                  <a:srgbClr val="595959"/>
-                </a:solidFill>
-                <a:latin typeface="Arial"/>
-              </a:rPr>
-              <a:t>Assess turns Progressa's picture into a ranked gap analysis — the right problems, in the right order — signed off as ground truth. It is the assessment method applied to a real sector.</a:t>
-            </a:r>
-          </a:p>
-        </p:txBody>
-      </p:sp>
-      <p:sp>
-        <p:nvSpPr>
-          <p:cNvPr id="17" name="Title 9">
-            <a:extLst>
-              <a:ext uri="{FF2B5EF4-FFF2-40B4-BE49-F238E27FC236}">
-                <a16:creationId xmlns:a16="http://schemas.microsoft.com/office/drawing/2014/main" id="{5E8796F7-DD26-D250-5E97-B38B22298E72}"/>
-              </a:ext>
-            </a:extLst>
-          </p:cNvPr>
-          <p:cNvSpPr txBox="1">
-            <a:spLocks/>
-          </p:cNvSpPr>
-          <p:nvPr/>
-        </p:nvSpPr>
-        <p:spPr>
-          <a:xfrm>
-            <a:off x="284452" y="4363897"/>
-            <a:ext cx="6382893" cy="953213"/>
-          </a:xfrm>
-          <a:prstGeom prst="rect">
-            <a:avLst/>
-          </a:prstGeom>
-        </p:spPr>
-        <p:txBody>
-          <a:bodyPr anchor="t">
-            <a:noAutofit/>
-          </a:bodyPr>
-          <a:lstStyle>
-            <a:lvl1pPr algn="l" defTabSz="914400" rtl="0" eaLnBrk="1" latinLnBrk="0" hangingPunct="1">
-              <a:lnSpc>
-                <a:spcPct val="90000"/>
-              </a:lnSpc>
-              <a:spcBef>
-                <a:spcPct val="0"/>
-              </a:spcBef>
-              <a:buNone/>
-              <a:defRPr sz="4000" kern="1200">
-                <a:solidFill>
-                  <a:schemeClr val="bg1"/>
-                </a:solidFill>
-                <a:latin typeface="Arial" panose="020B0604020202020204" pitchFamily="34" charset="0"/>
-                <a:ea typeface="+mj-ea"/>
-                <a:cs typeface="Arial" panose="020B0604020202020204" pitchFamily="34" charset="0"/>
-              </a:defRPr>
-            </a:lvl1pPr>
-          </a:lstStyle>
-          <a:p>
-            <a:pPr marL="0" marR="0" lvl="0" indent="0" rtl="0">
-              <a:spcBef>
-                <a:spcPts val="600"/>
-              </a:spcBef>
-              <a:spcAft>
-                <a:spcPts val="1200"/>
-              </a:spcAft>
-              <a:buNone/>
-            </a:pPr>
-            <a:r>
-              <a:rPr sz="1400" b="1" i="0">
-                <a:solidFill>
-                  <a:srgbClr val="1A1A1A"/>
-                </a:solidFill>
-                <a:latin typeface="Arial"/>
-              </a:rPr>
-              <a:t>Target audience: </a:t>
-            </a:r>
-            <a:r>
-              <a:rPr sz="1400" b="0" i="0">
-                <a:solidFill>
-                  <a:srgbClr val="1A1A1A"/>
-                </a:solidFill>
-                <a:latin typeface="Arial"/>
-              </a:rPr>
-              <a:t>Chief architect · senior architect · sector ICT lead</a:t>
-            </a:r>
-          </a:p>
-        </p:txBody>
-      </p:sp>
-      <p:sp>
-        <p:nvSpPr>
-          <p:cNvPr id="18" name="Rectangle 17"/>
-          <p:cNvSpPr/>
-          <p:nvPr/>
-        </p:nvSpPr>
-        <p:spPr>
-          <a:xfrm>
-            <a:off x="7022592" y="0"/>
-            <a:ext cx="5169103" cy="6858000"/>
-          </a:xfrm>
-          <a:prstGeom prst="rect">
-            <a:avLst/>
-          </a:prstGeom>
-          <a:solidFill>
-            <a:srgbClr val="009CD6"/>
-          </a:solidFill>
-          <a:ln>
-            <a:noFill/>
-          </a:ln>
-          <a:effectLst/>
-        </p:spPr>
-        <p:style>
-          <a:lnRef idx="1">
-            <a:schemeClr val="accent1"/>
-          </a:lnRef>
-          <a:fillRef idx="3">
-            <a:schemeClr val="accent1"/>
-          </a:fillRef>
-          <a:effectRef idx="2">
-            <a:schemeClr val="accent1"/>
-          </a:effectRef>
-          <a:fontRef idx="minor">
-            <a:schemeClr val="lt1"/>
-          </a:fontRef>
-        </p:style>
-        <p:txBody>
-          <a:bodyPr rtlCol="0" anchor="ctr"/>
-          <a:lstStyle/>
-          <a:p>
-            <a:pPr algn="ctr"/>
-          </a:p>
-        </p:txBody>
-      </p:sp>
-      <p:sp>
-        <p:nvSpPr>
-          <p:cNvPr id="19" name="TextBox 18"/>
-          <p:cNvSpPr txBox="1"/>
-          <p:nvPr/>
-        </p:nvSpPr>
-        <p:spPr>
-          <a:xfrm>
-            <a:off x="7452360" y="457200"/>
-            <a:ext cx="4297680" cy="457200"/>
-          </a:xfrm>
-          <a:prstGeom prst="rect">
-            <a:avLst/>
-          </a:prstGeom>
-          <a:noFill/>
-        </p:spPr>
-        <p:txBody>
-          <a:bodyPr wrap="square">
-            <a:spAutoFit/>
-          </a:bodyPr>
-          <a:lstStyle/>
-          <a:p>
-            <a:r>
-              <a:rPr sz="1100" b="1" i="0">
-                <a:solidFill>
-                  <a:srgbClr val="E5F5FB"/>
-                </a:solidFill>
-                <a:latin typeface="Arial"/>
-              </a:rPr>
-              <a:t>THE FIVE PHASES, RUN ON ONE SECTOR</a:t>
-            </a:r>
-          </a:p>
-        </p:txBody>
-      </p:sp>
-      <p:sp>
-        <p:nvSpPr>
-          <p:cNvPr id="20" name="Rounded Rectangle 19"/>
-          <p:cNvSpPr/>
-          <p:nvPr/>
-        </p:nvSpPr>
-        <p:spPr>
-          <a:xfrm>
-            <a:off x="7452360" y="960120"/>
-            <a:ext cx="3840480" cy="658368"/>
-          </a:xfrm>
-          <a:prstGeom prst="roundRect">
-            <a:avLst>
-              <a:gd name="adj" fmla="val 14000"/>
-            </a:avLst>
-          </a:prstGeom>
-          <a:solidFill>
-            <a:srgbClr val="FFFFFF"/>
-          </a:solidFill>
-          <a:ln>
-            <a:noFill/>
-          </a:ln>
-          <a:effectLst/>
-        </p:spPr>
-        <p:style>
-          <a:lnRef idx="1">
-            <a:schemeClr val="accent1"/>
-          </a:lnRef>
-          <a:fillRef idx="3">
-            <a:schemeClr val="accent1"/>
-          </a:fillRef>
-          <a:effectRef idx="2">
-            <a:schemeClr val="accent1"/>
-          </a:effectRef>
-          <a:fontRef idx="minor">
-            <a:schemeClr val="lt1"/>
-          </a:fontRef>
-        </p:style>
-        <p:txBody>
-          <a:bodyPr rtlCol="0" anchor="ctr" lIns="164592" wrap="square"/>
-          <a:lstStyle/>
-          <a:p>
-            <a:pPr algn="ctr"/>
-            <a:r>
-              <a:rPr sz="1500" b="1" i="0">
-                <a:solidFill>
-                  <a:srgbClr val="1A1A1A"/>
-                </a:solidFill>
-                <a:latin typeface="Arial"/>
-              </a:rPr>
-              <a:t>Discover — an honest picture</a:t>
-            </a:r>
-          </a:p>
-        </p:txBody>
-      </p:sp>
-      <p:sp>
-        <p:nvSpPr>
-          <p:cNvPr id="21" name="Rounded Rectangle 20"/>
-          <p:cNvSpPr/>
-          <p:nvPr/>
-        </p:nvSpPr>
-        <p:spPr>
-          <a:xfrm>
-            <a:off x="7452360" y="1892808"/>
-            <a:ext cx="3840480" cy="658368"/>
-          </a:xfrm>
-          <a:prstGeom prst="roundRect">
-            <a:avLst>
-              <a:gd name="adj" fmla="val 14000"/>
-            </a:avLst>
-          </a:prstGeom>
-          <a:solidFill>
-            <a:srgbClr val="FFFFFF"/>
-          </a:solidFill>
-          <a:ln>
-            <a:noFill/>
-          </a:ln>
-          <a:effectLst/>
-        </p:spPr>
-        <p:style>
-          <a:lnRef idx="1">
-            <a:schemeClr val="accent1"/>
-          </a:lnRef>
-          <a:fillRef idx="3">
-            <a:schemeClr val="accent1"/>
-          </a:fillRef>
-          <a:effectRef idx="2">
-            <a:schemeClr val="accent1"/>
-          </a:effectRef>
-          <a:fontRef idx="minor">
-            <a:schemeClr val="lt1"/>
-          </a:fontRef>
-        </p:style>
-        <p:txBody>
-          <a:bodyPr rtlCol="0" anchor="ctr" lIns="164592" wrap="square"/>
-          <a:lstStyle/>
-          <a:p>
-            <a:pPr algn="ctr"/>
-            <a:r>
-              <a:rPr sz="1500" b="1" i="0">
-                <a:solidFill>
-                  <a:srgbClr val="1A1A1A"/>
-                </a:solidFill>
-                <a:latin typeface="Arial"/>
-              </a:rPr>
-              <a:t>Assess — a ranked gap analysis</a:t>
-            </a:r>
-          </a:p>
-        </p:txBody>
-      </p:sp>
-      <p:sp>
-        <p:nvSpPr>
-          <p:cNvPr id="22" name="Rounded Rectangle 21"/>
-          <p:cNvSpPr/>
-          <p:nvPr/>
-        </p:nvSpPr>
-        <p:spPr>
-          <a:xfrm>
-            <a:off x="7452360" y="2825496"/>
-            <a:ext cx="3840480" cy="658368"/>
-          </a:xfrm>
-          <a:prstGeom prst="roundRect">
-            <a:avLst>
-              <a:gd name="adj" fmla="val 14000"/>
-            </a:avLst>
-          </a:prstGeom>
-          <a:solidFill>
-            <a:srgbClr val="FFFFFF"/>
-          </a:solidFill>
-          <a:ln>
-            <a:noFill/>
-          </a:ln>
-          <a:effectLst/>
-        </p:spPr>
-        <p:style>
-          <a:lnRef idx="1">
-            <a:schemeClr val="accent1"/>
-          </a:lnRef>
-          <a:fillRef idx="3">
-            <a:schemeClr val="accent1"/>
-          </a:fillRef>
-          <a:effectRef idx="2">
-            <a:schemeClr val="accent1"/>
-          </a:effectRef>
-          <a:fontRef idx="minor">
-            <a:schemeClr val="lt1"/>
-          </a:fontRef>
-        </p:style>
-        <p:txBody>
-          <a:bodyPr rtlCol="0" anchor="ctr" lIns="164592" wrap="square"/>
-          <a:lstStyle/>
-          <a:p>
-            <a:pPr algn="ctr"/>
-            <a:r>
-              <a:rPr sz="1500" b="1" i="0">
-                <a:solidFill>
-                  <a:srgbClr val="1A1A1A"/>
-                </a:solidFill>
-                <a:latin typeface="Arial"/>
-              </a:rPr>
-              <a:t>Adapt — framework and sourcing</a:t>
-            </a:r>
-          </a:p>
-        </p:txBody>
-      </p:sp>
-      <p:sp>
-        <p:nvSpPr>
-          <p:cNvPr id="23" name="Rounded Rectangle 22"/>
-          <p:cNvSpPr/>
-          <p:nvPr/>
-        </p:nvSpPr>
-        <p:spPr>
-          <a:xfrm>
-            <a:off x="7452360" y="3758184"/>
-            <a:ext cx="3840480" cy="658368"/>
-          </a:xfrm>
-          <a:prstGeom prst="roundRect">
-            <a:avLst>
-              <a:gd name="adj" fmla="val 14000"/>
-            </a:avLst>
-          </a:prstGeom>
-          <a:solidFill>
-            <a:srgbClr val="FFFFFF"/>
-          </a:solidFill>
-          <a:ln>
-            <a:noFill/>
-          </a:ln>
-          <a:effectLst/>
-        </p:spPr>
-        <p:style>
-          <a:lnRef idx="1">
-            <a:schemeClr val="accent1"/>
-          </a:lnRef>
-          <a:fillRef idx="3">
-            <a:schemeClr val="accent1"/>
-          </a:fillRef>
-          <a:effectRef idx="2">
-            <a:schemeClr val="accent1"/>
-          </a:effectRef>
-          <a:fontRef idx="minor">
-            <a:schemeClr val="lt1"/>
-          </a:fontRef>
-        </p:style>
-        <p:txBody>
-          <a:bodyPr rtlCol="0" anchor="ctr" lIns="164592" wrap="square"/>
-          <a:lstStyle/>
-          <a:p>
-            <a:pPr algn="ctr"/>
-            <a:r>
-              <a:rPr sz="1500" b="1" i="0">
-                <a:solidFill>
-                  <a:srgbClr val="1A1A1A"/>
-                </a:solidFill>
-                <a:latin typeface="Arial"/>
-              </a:rPr>
-              <a:t>Plan — the target, then the roadmap</a:t>
-            </a:r>
-          </a:p>
-        </p:txBody>
-      </p:sp>
-      <p:sp>
-        <p:nvSpPr>
-          <p:cNvPr id="24" name="Rounded Rectangle 23"/>
-          <p:cNvSpPr/>
-          <p:nvPr/>
-        </p:nvSpPr>
-        <p:spPr>
-          <a:xfrm>
-            <a:off x="7452360" y="4690872"/>
-            <a:ext cx="3840480" cy="658368"/>
-          </a:xfrm>
-          <a:prstGeom prst="roundRect">
-            <a:avLst>
-              <a:gd name="adj" fmla="val 14000"/>
-            </a:avLst>
-          </a:prstGeom>
-          <a:solidFill>
-            <a:srgbClr val="006E96"/>
-          </a:solidFill>
-          <a:ln>
-            <a:noFill/>
-          </a:ln>
-          <a:effectLst/>
-        </p:spPr>
-        <p:style>
-          <a:lnRef idx="1">
-            <a:schemeClr val="accent1"/>
-          </a:lnRef>
-          <a:fillRef idx="3">
-            <a:schemeClr val="accent1"/>
-          </a:fillRef>
-          <a:effectRef idx="2">
-            <a:schemeClr val="accent1"/>
-          </a:effectRef>
-          <a:fontRef idx="minor">
-            <a:schemeClr val="lt1"/>
-          </a:fontRef>
-        </p:style>
-        <p:txBody>
-          <a:bodyPr rtlCol="0" anchor="ctr" lIns="164592" wrap="square"/>
-          <a:lstStyle/>
-          <a:p>
-            <a:pPr algn="ctr"/>
-            <a:r>
-              <a:rPr sz="1500" b="1" i="0">
-                <a:solidFill>
-                  <a:srgbClr val="FFFFFF"/>
-                </a:solidFill>
-                <a:latin typeface="Arial"/>
-              </a:rPr>
-              <a:t>Execute &amp; Govern — the living EA</a:t>
-            </a:r>
-          </a:p>
-        </p:txBody>
-      </p:sp>
-      <p:sp>
-        <p:nvSpPr>
-          <p:cNvPr id="25" name="TextBox 24"/>
-          <p:cNvSpPr txBox="1"/>
-          <p:nvPr/>
-        </p:nvSpPr>
-        <p:spPr>
-          <a:xfrm>
-            <a:off x="7452360" y="5806440"/>
-            <a:ext cx="4297680" cy="731520"/>
-          </a:xfrm>
-          <a:prstGeom prst="rect">
-            <a:avLst/>
-          </a:prstGeom>
-          <a:noFill/>
-        </p:spPr>
-        <p:txBody>
-          <a:bodyPr wrap="square">
-            <a:spAutoFit/>
-          </a:bodyPr>
-          <a:lstStyle/>
-          <a:p>
-            <a:r>
-              <a:rPr sz="1200" b="0" i="0">
-                <a:solidFill>
-                  <a:srgbClr val="FFFFFF"/>
-                </a:solidFill>
-                <a:latin typeface="Arial"/>
-              </a:rPr>
-              <a:t>5 phases · 4 sign-offs · 6 deliverables · 1 worked sector</a:t>
-            </a:r>
-          </a:p>
-        </p:txBody>
-      </p:sp>
-    </p:spTree>
-    <p:extLst>
-      <p:ext uri="{BB962C8B-B14F-4D97-AF65-F5344CB8AC3E}">
-        <p14:creationId xmlns:p14="http://schemas.microsoft.com/office/powerpoint/2010/main" val="1196800265"/>
-      </p:ext>
-    </p:extLst>
-  </p:cSld>
-  <p:clrMapOvr>
-    <a:masterClrMapping/>
-  </p:clrMapOvr>
-</p:sld>
-</file>
-
-<file path=ppt/slides/slide17.xml><?xml version="1.0" encoding="utf-8"?>
-<p:sld xmlns:a="http://schemas.openxmlformats.org/drawingml/2006/main" xmlns:p="http://schemas.openxmlformats.org/presentationml/2006/main" xmlns:r="http://schemas.openxmlformats.org/officeDocument/2006/relationships">
-  <p:cSld>
-    <p:spTree>
-      <p:nvGrpSpPr>
-        <p:cNvPr id="1" name=""/>
-        <p:cNvGrpSpPr/>
-        <p:nvPr/>
-      </p:nvGrpSpPr>
-      <p:grpSpPr/>
-      <p:sp>
-        <p:nvSpPr>
-          <p:cNvPr id="2" name="TextBox 1"/>
-          <p:cNvSpPr txBox="1"/>
-          <p:nvPr/>
-        </p:nvSpPr>
-        <p:spPr>
-          <a:xfrm>
-            <a:off x="822960" y="822960"/>
-            <a:ext cx="7315200" cy="457200"/>
-          </a:xfrm>
-          <a:prstGeom prst="rect">
-            <a:avLst/>
-          </a:prstGeom>
-          <a:noFill/>
-        </p:spPr>
-        <p:txBody>
-          <a:bodyPr wrap="square">
-            <a:spAutoFit/>
-          </a:bodyPr>
-          <a:lstStyle/>
-          <a:p>
-            <a:r>
-              <a:rPr sz="1200" b="1" i="0">
-                <a:solidFill>
-                  <a:srgbClr val="595959"/>
-                </a:solidFill>
-                <a:latin typeface="Arial"/>
-              </a:rPr>
-              <a:t>KP1 · MODULE 4 · VIDEO 4.3</a:t>
-            </a:r>
-          </a:p>
-        </p:txBody>
-      </p:sp>
-      <p:sp>
-        <p:nvSpPr>
-          <p:cNvPr id="3" name="TextBox 2"/>
-          <p:cNvSpPr txBox="1"/>
-          <p:nvPr/>
-        </p:nvSpPr>
-        <p:spPr>
-          <a:xfrm>
-            <a:off x="822960" y="1828800"/>
-            <a:ext cx="2011680" cy="1097280"/>
-          </a:xfrm>
-          <a:prstGeom prst="rect">
-            <a:avLst/>
-          </a:prstGeom>
-          <a:noFill/>
-        </p:spPr>
-        <p:txBody>
-          <a:bodyPr wrap="square">
-            <a:spAutoFit/>
-          </a:bodyPr>
-          <a:lstStyle/>
-          <a:p>
-            <a:r>
-              <a:rPr sz="6000" b="1" i="0">
-                <a:solidFill>
-                  <a:srgbClr val="009CD6"/>
-                </a:solidFill>
-                <a:latin typeface="Arial"/>
-              </a:rPr>
-              <a:t>4.3</a:t>
-            </a:r>
-          </a:p>
-        </p:txBody>
-      </p:sp>
-      <p:sp>
-        <p:nvSpPr>
-          <p:cNvPr id="4" name="TextBox 3"/>
-          <p:cNvSpPr txBox="1"/>
-          <p:nvPr/>
-        </p:nvSpPr>
-        <p:spPr>
-          <a:xfrm>
-            <a:off x="822960" y="2880360"/>
-            <a:ext cx="9601200" cy="1371600"/>
-          </a:xfrm>
-          <a:prstGeom prst="rect">
-            <a:avLst/>
-          </a:prstGeom>
-          <a:noFill/>
-        </p:spPr>
-        <p:txBody>
-          <a:bodyPr wrap="square">
-            <a:spAutoFit/>
-          </a:bodyPr>
-          <a:lstStyle/>
-          <a:p>
-            <a:r>
-              <a:rPr sz="3400" b="1" i="0">
-                <a:solidFill>
-                  <a:srgbClr val="1A1A1A"/>
-                </a:solidFill>
-                <a:latin typeface="Arial"/>
-              </a:rPr>
-              <a:t>Phase 2, Assess — find the gaps and rank them</a:t>
-            </a:r>
-          </a:p>
-        </p:txBody>
-      </p:sp>
-      <p:sp>
-        <p:nvSpPr>
-          <p:cNvPr id="5" name="TextBox 4"/>
-          <p:cNvSpPr txBox="1"/>
-          <p:nvPr/>
-        </p:nvSpPr>
-        <p:spPr>
-          <a:xfrm>
-            <a:off x="822960" y="4343400"/>
-            <a:ext cx="9875520" cy="1554480"/>
-          </a:xfrm>
-          <a:prstGeom prst="rect">
-            <a:avLst/>
-          </a:prstGeom>
-          <a:noFill/>
-        </p:spPr>
-        <p:txBody>
-          <a:bodyPr wrap="square">
-            <a:spAutoFit/>
-          </a:bodyPr>
-          <a:lstStyle/>
-          <a:p>
-            <a:r>
-              <a:rPr sz="1700" b="0" i="1">
-                <a:solidFill>
-                  <a:srgbClr val="595959"/>
-                </a:solidFill>
-                <a:latin typeface="Arial"/>
-              </a:rPr>
-              <a:t>Assess turns Progressa's picture into a ranked gap analysis — the right problems, in the right order — signed off as ground truth. It is the assessment method applied to a real sector.</a:t>
-            </a:r>
-          </a:p>
-        </p:txBody>
-      </p:sp>
-      <p:sp>
-        <p:nvSpPr>
-          <p:cNvPr id="6" name="TextBox 5"/>
-          <p:cNvSpPr txBox="1"/>
-          <p:nvPr/>
-        </p:nvSpPr>
-        <p:spPr>
-          <a:xfrm>
-            <a:off x="822960" y="5989320"/>
-            <a:ext cx="7315200" cy="365760"/>
-          </a:xfrm>
-          <a:prstGeom prst="rect">
-            <a:avLst/>
-          </a:prstGeom>
-          <a:noFill/>
-        </p:spPr>
-        <p:txBody>
-          <a:bodyPr wrap="square">
-            <a:spAutoFit/>
-          </a:bodyPr>
-          <a:lstStyle/>
-          <a:p>
-            <a:r>
-              <a:rPr sz="1200" b="0" i="0">
-                <a:solidFill>
-                  <a:srgbClr val="595959"/>
-                </a:solidFill>
-                <a:latin typeface="Arial"/>
-              </a:rPr>
-              <a:t>~3 minutes · standalone video · voice-over on text slides</a:t>
-            </a:r>
-          </a:p>
-        </p:txBody>
-      </p:sp>
-    </p:spTree>
-  </p:cSld>
-  <p:clrMapOvr>
-    <a:masterClrMapping/>
-  </p:clrMapOvr>
-</p:sld>
-</file>
-
-<file path=ppt/slides/slide18.xml><?xml version="1.0" encoding="utf-8"?>
-<p:sld xmlns:a="http://schemas.openxmlformats.org/drawingml/2006/main" xmlns:p="http://schemas.openxmlformats.org/presentationml/2006/main" xmlns:r="http://schemas.openxmlformats.org/officeDocument/2006/relationships">
-  <p:cSld>
-    <p:spTree>
-      <p:nvGrpSpPr>
-        <p:cNvPr id="1" name=""/>
-        <p:cNvGrpSpPr/>
-        <p:nvPr/>
-      </p:nvGrpSpPr>
-      <p:grpSpPr/>
-      <p:sp>
-        <p:nvSpPr>
-          <p:cNvPr id="2" name="Rectangle 1"/>
-          <p:cNvSpPr/>
-          <p:nvPr/>
-        </p:nvSpPr>
-        <p:spPr>
-          <a:xfrm>
-            <a:off x="457200" y="384048"/>
-            <a:ext cx="45720" cy="256032"/>
-          </a:xfrm>
-          <a:prstGeom prst="rect">
-            <a:avLst/>
-          </a:prstGeom>
-          <a:solidFill>
-            <a:srgbClr val="009CD6"/>
-          </a:solidFill>
-          <a:ln>
-            <a:noFill/>
-          </a:ln>
-          <a:effectLst/>
-        </p:spPr>
-        <p:style>
-          <a:lnRef idx="1">
-            <a:schemeClr val="accent1"/>
-          </a:lnRef>
-          <a:fillRef idx="3">
-            <a:schemeClr val="accent1"/>
-          </a:fillRef>
-          <a:effectRef idx="2">
-            <a:schemeClr val="accent1"/>
-          </a:effectRef>
-          <a:fontRef idx="minor">
-            <a:schemeClr val="lt1"/>
-          </a:fontRef>
-        </p:style>
-        <p:txBody>
-          <a:bodyPr rtlCol="0" anchor="ctr"/>
-          <a:lstStyle/>
-          <a:p>
-            <a:pPr algn="ctr"/>
-          </a:p>
-        </p:txBody>
-      </p:sp>
-      <p:sp>
-        <p:nvSpPr>
-          <p:cNvPr id="3" name="TextBox 2"/>
-          <p:cNvSpPr txBox="1"/>
-          <p:nvPr/>
-        </p:nvSpPr>
-        <p:spPr>
-          <a:xfrm>
-            <a:off x="621792" y="274320"/>
-            <a:ext cx="11247120" cy="914400"/>
-          </a:xfrm>
-          <a:prstGeom prst="rect">
-            <a:avLst/>
-          </a:prstGeom>
-          <a:noFill/>
-        </p:spPr>
-        <p:txBody>
-          <a:bodyPr wrap="square">
-            <a:spAutoFit/>
-          </a:bodyPr>
-          <a:lstStyle/>
-          <a:p>
-            <a:r>
-              <a:rPr sz="2800" b="1" i="0">
-                <a:solidFill>
-                  <a:srgbClr val="1A1A1A"/>
-                </a:solidFill>
-                <a:latin typeface="Arial"/>
-              </a:rPr>
-              <a:t>Score the capabilities and “things are bad” becomes a map</a:t>
-            </a:r>
-          </a:p>
-        </p:txBody>
-      </p:sp>
-      <p:sp>
-        <p:nvSpPr>
-          <p:cNvPr id="4" name="Oval 3"/>
-          <p:cNvSpPr/>
-          <p:nvPr/>
-        </p:nvSpPr>
-        <p:spPr>
-          <a:xfrm>
-            <a:off x="621792" y="1508760"/>
-            <a:ext cx="310896" cy="310896"/>
-          </a:xfrm>
-          <a:prstGeom prst="ellipse">
-            <a:avLst/>
-          </a:prstGeom>
-          <a:solidFill>
-            <a:srgbClr val="009CD6"/>
-          </a:solidFill>
-          <a:ln>
-            <a:noFill/>
-          </a:ln>
-          <a:effectLst/>
-        </p:spPr>
-        <p:style>
-          <a:lnRef idx="1">
-            <a:schemeClr val="accent1"/>
-          </a:lnRef>
-          <a:fillRef idx="3">
-            <a:schemeClr val="accent1"/>
-          </a:fillRef>
-          <a:effectRef idx="2">
-            <a:schemeClr val="accent1"/>
-          </a:effectRef>
-          <a:fontRef idx="minor">
-            <a:schemeClr val="lt1"/>
-          </a:fontRef>
-        </p:style>
-        <p:txBody>
-          <a:bodyPr rtlCol="0" anchor="ctr" lIns="0" rIns="0" tIns="0" bIns="0" wrap="square"/>
-          <a:lstStyle/>
-          <a:p>
-            <a:pPr algn="ctr"/>
-            <a:r>
-              <a:rPr sz="1300" b="1" i="0">
-                <a:solidFill>
-                  <a:srgbClr val="FFFFFF"/>
-                </a:solidFill>
-                <a:latin typeface="Arial"/>
-              </a:rPr>
-              <a:t>1</a:t>
-            </a:r>
-          </a:p>
-        </p:txBody>
-      </p:sp>
-      <p:sp>
-        <p:nvSpPr>
-          <p:cNvPr id="5" name="TextBox 4"/>
-          <p:cNvSpPr txBox="1"/>
-          <p:nvPr/>
-        </p:nvSpPr>
-        <p:spPr>
-          <a:xfrm>
-            <a:off x="1115568" y="1463040"/>
-            <a:ext cx="10527487" cy="1028699"/>
-          </a:xfrm>
-          <a:prstGeom prst="rect">
-            <a:avLst/>
-          </a:prstGeom>
-          <a:noFill/>
-        </p:spPr>
-        <p:txBody>
-          <a:bodyPr wrap="square">
-            <a:spAutoFit/>
-          </a:bodyPr>
-          <a:lstStyle/>
-          <a:p>
-            <a:pPr>
-              <a:spcAft>
-                <a:spcPts val="300"/>
-              </a:spcAft>
-            </a:pPr>
-            <a:r>
-              <a:rPr sz="1900" b="1" i="0">
-                <a:solidFill>
-                  <a:srgbClr val="1A1A1A"/>
-                </a:solidFill>
-                <a:latin typeface="Arial"/>
-              </a:rPr>
-              <a:t>Register a learner — LOW</a:t>
-            </a:r>
-          </a:p>
-          <a:p>
-            <a:pPr>
-              <a:spcAft>
-                <a:spcPts val="300"/>
-              </a:spcAft>
-            </a:pPr>
-            <a:r>
-              <a:rPr sz="1550" b="0" i="0">
-                <a:solidFill>
-                  <a:srgbClr val="595959"/>
-                </a:solidFill>
-                <a:latin typeface="Arial"/>
-              </a:rPr>
-              <a:t>Three lists, none of them authoritative.</a:t>
-            </a:r>
-          </a:p>
-        </p:txBody>
-      </p:sp>
-      <p:sp>
-        <p:nvSpPr>
-          <p:cNvPr id="6" name="Rectangle 5"/>
-          <p:cNvSpPr/>
-          <p:nvPr/>
-        </p:nvSpPr>
-        <p:spPr>
-          <a:xfrm>
-            <a:off x="621792" y="2496312"/>
-            <a:ext cx="10881360" cy="12700"/>
-          </a:xfrm>
-          <a:prstGeom prst="rect">
-            <a:avLst/>
-          </a:prstGeom>
-          <a:solidFill>
-            <a:srgbClr val="DDECF4"/>
-          </a:solidFill>
-          <a:ln>
-            <a:noFill/>
-          </a:ln>
-          <a:effectLst/>
-        </p:spPr>
-        <p:style>
-          <a:lnRef idx="1">
-            <a:schemeClr val="accent1"/>
-          </a:lnRef>
-          <a:fillRef idx="3">
-            <a:schemeClr val="accent1"/>
-          </a:fillRef>
-          <a:effectRef idx="2">
-            <a:schemeClr val="accent1"/>
-          </a:effectRef>
-          <a:fontRef idx="minor">
-            <a:schemeClr val="lt1"/>
-          </a:fontRef>
-        </p:style>
-        <p:txBody>
-          <a:bodyPr rtlCol="0" anchor="ctr"/>
-          <a:lstStyle/>
-          <a:p>
-            <a:pPr algn="ctr"/>
-          </a:p>
-        </p:txBody>
-      </p:sp>
-      <p:sp>
-        <p:nvSpPr>
-          <p:cNvPr id="7" name="Oval 6"/>
-          <p:cNvSpPr/>
-          <p:nvPr/>
-        </p:nvSpPr>
-        <p:spPr>
-          <a:xfrm>
-            <a:off x="621792" y="2583179"/>
-            <a:ext cx="310896" cy="310896"/>
-          </a:xfrm>
-          <a:prstGeom prst="ellipse">
-            <a:avLst/>
-          </a:prstGeom>
-          <a:solidFill>
-            <a:srgbClr val="009CD6"/>
-          </a:solidFill>
-          <a:ln>
-            <a:noFill/>
-          </a:ln>
-          <a:effectLst/>
-        </p:spPr>
-        <p:style>
-          <a:lnRef idx="1">
-            <a:schemeClr val="accent1"/>
-          </a:lnRef>
-          <a:fillRef idx="3">
-            <a:schemeClr val="accent1"/>
-          </a:fillRef>
-          <a:effectRef idx="2">
-            <a:schemeClr val="accent1"/>
-          </a:effectRef>
-          <a:fontRef idx="minor">
-            <a:schemeClr val="lt1"/>
-          </a:fontRef>
-        </p:style>
-        <p:txBody>
-          <a:bodyPr rtlCol="0" anchor="ctr" lIns="0" rIns="0" tIns="0" bIns="0" wrap="square"/>
-          <a:lstStyle/>
-          <a:p>
-            <a:pPr algn="ctr"/>
-            <a:r>
-              <a:rPr sz="1300" b="1" i="0">
-                <a:solidFill>
-                  <a:srgbClr val="FFFFFF"/>
-                </a:solidFill>
-                <a:latin typeface="Arial"/>
-              </a:rPr>
-              <a:t>2</a:t>
-            </a:r>
-          </a:p>
-        </p:txBody>
-      </p:sp>
-      <p:sp>
-        <p:nvSpPr>
-          <p:cNvPr id="8" name="TextBox 7"/>
-          <p:cNvSpPr txBox="1"/>
-          <p:nvPr/>
-        </p:nvSpPr>
-        <p:spPr>
-          <a:xfrm>
-            <a:off x="1115568" y="2537460"/>
-            <a:ext cx="10527487" cy="1028699"/>
-          </a:xfrm>
-          <a:prstGeom prst="rect">
-            <a:avLst/>
-          </a:prstGeom>
-          <a:noFill/>
-        </p:spPr>
-        <p:txBody>
-          <a:bodyPr wrap="square">
-            <a:spAutoFit/>
-          </a:bodyPr>
-          <a:lstStyle/>
-          <a:p>
-            <a:pPr>
-              <a:spcAft>
-                <a:spcPts val="300"/>
-              </a:spcAft>
-            </a:pPr>
-            <a:r>
-              <a:rPr sz="1900" b="1" i="0">
-                <a:solidFill>
-                  <a:srgbClr val="1A1A1A"/>
-                </a:solidFill>
-                <a:latin typeface="Arial"/>
-              </a:rPr>
-              <a:t>Prove identity — MEDIUM</a:t>
-            </a:r>
-          </a:p>
-          <a:p>
-            <a:pPr>
-              <a:spcAft>
-                <a:spcPts val="300"/>
-              </a:spcAft>
-            </a:pPr>
-            <a:r>
-              <a:rPr sz="1550" b="0" i="0">
-                <a:solidFill>
-                  <a:srgbClr val="595959"/>
-                </a:solidFill>
-                <a:latin typeface="Arial"/>
-              </a:rPr>
-              <a:t>PNIA exists; education does not consume it.</a:t>
-            </a:r>
-          </a:p>
-        </p:txBody>
-      </p:sp>
-      <p:sp>
-        <p:nvSpPr>
-          <p:cNvPr id="9" name="Rectangle 8"/>
-          <p:cNvSpPr/>
-          <p:nvPr/>
-        </p:nvSpPr>
-        <p:spPr>
-          <a:xfrm>
-            <a:off x="621792" y="3570732"/>
-            <a:ext cx="10881360" cy="12700"/>
-          </a:xfrm>
-          <a:prstGeom prst="rect">
-            <a:avLst/>
-          </a:prstGeom>
-          <a:solidFill>
-            <a:srgbClr val="DDECF4"/>
-          </a:solidFill>
-          <a:ln>
-            <a:noFill/>
-          </a:ln>
-          <a:effectLst/>
-        </p:spPr>
-        <p:style>
-          <a:lnRef idx="1">
-            <a:schemeClr val="accent1"/>
-          </a:lnRef>
-          <a:fillRef idx="3">
-            <a:schemeClr val="accent1"/>
-          </a:fillRef>
-          <a:effectRef idx="2">
-            <a:schemeClr val="accent1"/>
-          </a:effectRef>
-          <a:fontRef idx="minor">
-            <a:schemeClr val="lt1"/>
-          </a:fontRef>
-        </p:style>
-        <p:txBody>
-          <a:bodyPr rtlCol="0" anchor="ctr"/>
-          <a:lstStyle/>
-          <a:p>
-            <a:pPr algn="ctr"/>
-          </a:p>
-        </p:txBody>
-      </p:sp>
-      <p:sp>
-        <p:nvSpPr>
-          <p:cNvPr id="10" name="Oval 9"/>
-          <p:cNvSpPr/>
-          <p:nvPr/>
-        </p:nvSpPr>
-        <p:spPr>
-          <a:xfrm>
-            <a:off x="621792" y="3657599"/>
-            <a:ext cx="310896" cy="310896"/>
-          </a:xfrm>
-          <a:prstGeom prst="ellipse">
-            <a:avLst/>
-          </a:prstGeom>
-          <a:solidFill>
-            <a:srgbClr val="009CD6"/>
-          </a:solidFill>
-          <a:ln>
-            <a:noFill/>
-          </a:ln>
-          <a:effectLst/>
-        </p:spPr>
-        <p:style>
-          <a:lnRef idx="1">
-            <a:schemeClr val="accent1"/>
-          </a:lnRef>
-          <a:fillRef idx="3">
-            <a:schemeClr val="accent1"/>
-          </a:fillRef>
-          <a:effectRef idx="2">
-            <a:schemeClr val="accent1"/>
-          </a:effectRef>
-          <a:fontRef idx="minor">
-            <a:schemeClr val="lt1"/>
-          </a:fontRef>
-        </p:style>
-        <p:txBody>
-          <a:bodyPr rtlCol="0" anchor="ctr" lIns="0" rIns="0" tIns="0" bIns="0" wrap="square"/>
-          <a:lstStyle/>
-          <a:p>
-            <a:pPr algn="ctr"/>
-            <a:r>
-              <a:rPr sz="1300" b="1" i="0">
-                <a:solidFill>
-                  <a:srgbClr val="FFFFFF"/>
-                </a:solidFill>
-                <a:latin typeface="Arial"/>
-              </a:rPr>
-              <a:t>3</a:t>
-            </a:r>
-          </a:p>
-        </p:txBody>
-      </p:sp>
-      <p:sp>
-        <p:nvSpPr>
-          <p:cNvPr id="11" name="TextBox 10"/>
-          <p:cNvSpPr txBox="1"/>
-          <p:nvPr/>
-        </p:nvSpPr>
-        <p:spPr>
-          <a:xfrm>
-            <a:off x="1115568" y="3611879"/>
-            <a:ext cx="10527487" cy="1028699"/>
-          </a:xfrm>
-          <a:prstGeom prst="rect">
-            <a:avLst/>
-          </a:prstGeom>
-          <a:noFill/>
-        </p:spPr>
-        <p:txBody>
-          <a:bodyPr wrap="square">
-            <a:spAutoFit/>
-          </a:bodyPr>
-          <a:lstStyle/>
-          <a:p>
-            <a:pPr>
-              <a:spcAft>
-                <a:spcPts val="300"/>
-              </a:spcAft>
-            </a:pPr>
-            <a:r>
-              <a:rPr sz="1900" b="1" i="0">
-                <a:solidFill>
-                  <a:srgbClr val="1A1A1A"/>
-                </a:solidFill>
-                <a:latin typeface="Arial"/>
-              </a:rPr>
-              <a:t>Certify a result — HIGH</a:t>
-            </a:r>
-          </a:p>
-          <a:p>
-            <a:pPr>
-              <a:spcAft>
-                <a:spcPts val="300"/>
-              </a:spcAft>
-            </a:pPr>
-            <a:r>
-              <a:rPr sz="1550" b="0" i="0">
-                <a:solidFill>
-                  <a:srgbClr val="595959"/>
-                </a:solidFill>
-                <a:latin typeface="Arial"/>
-              </a:rPr>
-              <a:t>The Examination Authority does this well.</a:t>
-            </a:r>
-          </a:p>
-        </p:txBody>
-      </p:sp>
-      <p:sp>
-        <p:nvSpPr>
-          <p:cNvPr id="12" name="Rectangle 11"/>
-          <p:cNvSpPr/>
-          <p:nvPr/>
-        </p:nvSpPr>
-        <p:spPr>
-          <a:xfrm>
-            <a:off x="621792" y="4645152"/>
-            <a:ext cx="10881360" cy="12700"/>
-          </a:xfrm>
-          <a:prstGeom prst="rect">
-            <a:avLst/>
-          </a:prstGeom>
-          <a:solidFill>
-            <a:srgbClr val="DDECF4"/>
-          </a:solidFill>
-          <a:ln>
-            <a:noFill/>
-          </a:ln>
-          <a:effectLst/>
-        </p:spPr>
-        <p:style>
-          <a:lnRef idx="1">
-            <a:schemeClr val="accent1"/>
-          </a:lnRef>
-          <a:fillRef idx="3">
-            <a:schemeClr val="accent1"/>
-          </a:fillRef>
-          <a:effectRef idx="2">
-            <a:schemeClr val="accent1"/>
-          </a:effectRef>
-          <a:fontRef idx="minor">
-            <a:schemeClr val="lt1"/>
-          </a:fontRef>
-        </p:style>
-        <p:txBody>
-          <a:bodyPr rtlCol="0" anchor="ctr"/>
-          <a:lstStyle/>
-          <a:p>
-            <a:pPr algn="ctr"/>
-          </a:p>
-        </p:txBody>
-      </p:sp>
-      <p:sp>
-        <p:nvSpPr>
-          <p:cNvPr id="13" name="Oval 12"/>
-          <p:cNvSpPr/>
-          <p:nvPr/>
-        </p:nvSpPr>
-        <p:spPr>
-          <a:xfrm>
-            <a:off x="621792" y="4732020"/>
-            <a:ext cx="310896" cy="310896"/>
-          </a:xfrm>
-          <a:prstGeom prst="ellipse">
-            <a:avLst/>
-          </a:prstGeom>
-          <a:solidFill>
-            <a:srgbClr val="009CD6"/>
-          </a:solidFill>
-          <a:ln>
-            <a:noFill/>
-          </a:ln>
-          <a:effectLst/>
-        </p:spPr>
-        <p:style>
-          <a:lnRef idx="1">
-            <a:schemeClr val="accent1"/>
-          </a:lnRef>
-          <a:fillRef idx="3">
-            <a:schemeClr val="accent1"/>
-          </a:fillRef>
-          <a:effectRef idx="2">
-            <a:schemeClr val="accent1"/>
-          </a:effectRef>
-          <a:fontRef idx="minor">
-            <a:schemeClr val="lt1"/>
-          </a:fontRef>
-        </p:style>
-        <p:txBody>
-          <a:bodyPr rtlCol="0" anchor="ctr" lIns="0" rIns="0" tIns="0" bIns="0" wrap="square"/>
-          <a:lstStyle/>
-          <a:p>
-            <a:pPr algn="ctr"/>
-            <a:r>
-              <a:rPr sz="1300" b="1" i="0">
-                <a:solidFill>
-                  <a:srgbClr val="FFFFFF"/>
-                </a:solidFill>
-                <a:latin typeface="Arial"/>
-              </a:rPr>
-              <a:t>4</a:t>
-            </a:r>
-          </a:p>
-        </p:txBody>
-      </p:sp>
-      <p:sp>
-        <p:nvSpPr>
-          <p:cNvPr id="14" name="TextBox 13"/>
-          <p:cNvSpPr txBox="1"/>
-          <p:nvPr/>
-        </p:nvSpPr>
-        <p:spPr>
-          <a:xfrm>
-            <a:off x="1115568" y="4686300"/>
-            <a:ext cx="10527487" cy="1028699"/>
-          </a:xfrm>
-          <a:prstGeom prst="rect">
-            <a:avLst/>
-          </a:prstGeom>
-          <a:noFill/>
-        </p:spPr>
-        <p:txBody>
-          <a:bodyPr wrap="square">
-            <a:spAutoFit/>
-          </a:bodyPr>
-          <a:lstStyle/>
-          <a:p>
-            <a:pPr>
-              <a:spcAft>
-                <a:spcPts val="300"/>
-              </a:spcAft>
-            </a:pPr>
-            <a:r>
-              <a:rPr sz="1900" b="1" i="0">
-                <a:solidFill>
-                  <a:srgbClr val="1A1A1A"/>
-                </a:solidFill>
-                <a:latin typeface="Arial"/>
-              </a:rPr>
-              <a:t>Share data across bodies — VERY LOW</a:t>
-            </a:r>
-          </a:p>
-          <a:p>
-            <a:pPr>
-              <a:spcAft>
-                <a:spcPts val="300"/>
-              </a:spcAft>
-            </a:pPr>
-            <a:r>
-              <a:rPr sz="1550" b="0" i="0">
-                <a:solidFill>
-                  <a:srgbClr val="595959"/>
-                </a:solidFill>
-                <a:latin typeface="Arial"/>
-              </a:rPr>
-              <a:t>Almost everything still moves on paper.</a:t>
-            </a:r>
-          </a:p>
-        </p:txBody>
-      </p:sp>
-      <p:sp>
-        <p:nvSpPr>
-          <p:cNvPr id="15" name="TextBox 14"/>
-          <p:cNvSpPr txBox="1"/>
-          <p:nvPr/>
-        </p:nvSpPr>
-        <p:spPr>
-          <a:xfrm>
-            <a:off x="658368" y="5870448"/>
-            <a:ext cx="10881360" cy="548640"/>
-          </a:xfrm>
-          <a:prstGeom prst="rect">
-            <a:avLst/>
-          </a:prstGeom>
-          <a:noFill/>
-        </p:spPr>
-        <p:txBody>
-          <a:bodyPr wrap="square">
-            <a:spAutoFit/>
-          </a:bodyPr>
-          <a:lstStyle/>
-          <a:p>
-            <a:r>
-              <a:rPr sz="1550" b="1" i="0">
-                <a:solidFill>
-                  <a:srgbClr val="006E96"/>
-                </a:solidFill>
-                <a:latin typeface="Arial"/>
-              </a:rPr>
-              <a:t>Not everything is broken. Knowing exactly which part is, is the point.</a:t>
-            </a:r>
-          </a:p>
-        </p:txBody>
-      </p:sp>
-      <p:sp>
-        <p:nvSpPr>
-          <p:cNvPr id="16" name="TextBox 15"/>
-          <p:cNvSpPr txBox="1"/>
-          <p:nvPr/>
-        </p:nvSpPr>
-        <p:spPr>
-          <a:xfrm>
-            <a:off x="457200" y="6473952"/>
-            <a:ext cx="7772400" cy="292608"/>
-          </a:xfrm>
-          <a:prstGeom prst="rect">
-            <a:avLst/>
-          </a:prstGeom>
-          <a:noFill/>
-        </p:spPr>
-        <p:txBody>
-          <a:bodyPr wrap="square">
-            <a:spAutoFit/>
-          </a:bodyPr>
-          <a:lstStyle/>
-          <a:p>
-            <a:r>
-              <a:rPr sz="900" b="0" i="0">
-                <a:solidFill>
-                  <a:srgbClr val="595959"/>
-                </a:solidFill>
-                <a:latin typeface="Arial"/>
-              </a:rPr>
-              <a:t>4.3 · Phase 2, Assess — find the gaps and rank them</a:t>
-            </a:r>
-          </a:p>
-        </p:txBody>
-      </p:sp>
-    </p:spTree>
-  </p:cSld>
-  <p:clrMapOvr>
-    <a:masterClrMapping/>
-  </p:clrMapOvr>
-</p:sld>
-</file>
-
 <file path=ppt/slides/slide19.xml><?xml version="1.0" encoding="utf-8"?>
 <p:sld xmlns:a="http://schemas.openxmlformats.org/drawingml/2006/main" xmlns:p="http://schemas.openxmlformats.org/presentationml/2006/main" xmlns:r="http://schemas.openxmlformats.org/officeDocument/2006/relationships">
   <p:cSld>
@@ -13242,58 +11614,14 @@
       <p:grpSpPr/>
       <p:sp>
         <p:nvSpPr>
-          <p:cNvPr id="2" name="Rectangle 1"/>
-          <p:cNvSpPr/>
-          <p:nvPr/>
-        </p:nvSpPr>
-        <p:spPr>
-          <a:xfrm>
-            <a:off x="457200" y="384048"/>
-            <a:ext cx="45720" cy="256032"/>
-          </a:xfrm>
-          <a:prstGeom prst="rect">
-            <a:avLst/>
-          </a:prstGeom>
-          <a:solidFill>
-            <a:srgbClr val="009CD6"/>
-          </a:solidFill>
-          <a:ln>
-            <a:noFill/>
-          </a:ln>
-          <a:effectLst/>
-        </p:spPr>
-        <p:style>
-          <a:lnRef idx="1">
-            <a:schemeClr val="accent1"/>
-          </a:lnRef>
-          <a:fillRef idx="3">
-            <a:schemeClr val="accent1"/>
-          </a:fillRef>
-          <a:effectRef idx="2">
-            <a:schemeClr val="accent1"/>
-          </a:effectRef>
-          <a:fontRef idx="minor">
-            <a:schemeClr val="lt1"/>
-          </a:fontRef>
-        </p:style>
-        <p:txBody>
-          <a:bodyPr rtlCol="0" anchor="ctr"/>
-          <a:lstStyle/>
-          <a:p>
-            <a:pPr algn="ctr"/>
-          </a:p>
-        </p:txBody>
-      </p:sp>
-      <p:sp>
-        <p:nvSpPr>
-          <p:cNvPr id="3" name="TextBox 2"/>
+          <p:cNvPr id="2" name="TextBox 1"/>
           <p:cNvSpPr txBox="1"/>
           <p:nvPr/>
         </p:nvSpPr>
         <p:spPr>
           <a:xfrm>
-            <a:off x="621792" y="274320"/>
-            <a:ext cx="11247120" cy="914400"/>
+            <a:off x="822960" y="822960"/>
+            <a:ext cx="7315200" cy="457200"/>
           </a:xfrm>
           <a:prstGeom prst="rect">
             <a:avLst/>
@@ -13307,66 +11635,81 @@
           <a:lstStyle/>
           <a:p>
             <a:r>
-              <a:rPr sz="2800" b="1" i="0">
+              <a:rPr sz="1200" b="1" i="0">
+                <a:solidFill>
+                  <a:srgbClr val="595959"/>
+                </a:solidFill>
+                <a:latin typeface="Arial"/>
+              </a:rPr>
+              <a:t>KP1 · MODULE 4 · VIDEO 4.3</a:t>
+            </a:r>
+          </a:p>
+        </p:txBody>
+      </p:sp>
+      <p:sp>
+        <p:nvSpPr>
+          <p:cNvPr id="3" name="TextBox 2"/>
+          <p:cNvSpPr txBox="1"/>
+          <p:nvPr/>
+        </p:nvSpPr>
+        <p:spPr>
+          <a:xfrm>
+            <a:off x="822960" y="1828800"/>
+            <a:ext cx="2011680" cy="1097280"/>
+          </a:xfrm>
+          <a:prstGeom prst="rect">
+            <a:avLst/>
+          </a:prstGeom>
+          <a:noFill/>
+        </p:spPr>
+        <p:txBody>
+          <a:bodyPr wrap="square">
+            <a:spAutoFit/>
+          </a:bodyPr>
+          <a:lstStyle/>
+          <a:p>
+            <a:r>
+              <a:rPr sz="6000" b="1" i="0">
+                <a:solidFill>
+                  <a:srgbClr val="009CD6"/>
+                </a:solidFill>
+                <a:latin typeface="Arial"/>
+              </a:rPr>
+              <a:t>4.3</a:t>
+            </a:r>
+          </a:p>
+        </p:txBody>
+      </p:sp>
+      <p:sp>
+        <p:nvSpPr>
+          <p:cNvPr id="4" name="TextBox 3"/>
+          <p:cNvSpPr txBox="1"/>
+          <p:nvPr/>
+        </p:nvSpPr>
+        <p:spPr>
+          <a:xfrm>
+            <a:off x="822960" y="2880360"/>
+            <a:ext cx="9601200" cy="1371600"/>
+          </a:xfrm>
+          <a:prstGeom prst="rect">
+            <a:avLst/>
+          </a:prstGeom>
+          <a:noFill/>
+        </p:spPr>
+        <p:txBody>
+          <a:bodyPr wrap="square">
+            <a:spAutoFit/>
+          </a:bodyPr>
+          <a:lstStyle/>
+          <a:p>
+            <a:r>
+              <a:rPr sz="3400" b="1" i="0">
                 <a:solidFill>
                   <a:srgbClr val="1A1A1A"/>
                 </a:solidFill>
                 <a:latin typeface="Arial"/>
               </a:rPr>
-              <a:t>Four gaps surface on Progressa — and one has no owner</a:t>
-            </a:r>
-          </a:p>
-        </p:txBody>
-      </p:sp>
-      <p:sp>
-        <p:nvSpPr>
-          <p:cNvPr id="4" name="Oval 3"/>
-          <p:cNvSpPr/>
-          <p:nvPr/>
-        </p:nvSpPr>
-        <p:spPr>
-          <a:xfrm>
-            <a:off x="621792" y="1508760"/>
-            <a:ext cx="310896" cy="310896"/>
-          </a:xfrm>
-          <a:prstGeom prst="ellipse">
-            <a:avLst/>
-          </a:prstGeom>
-          <a:solidFill>
-            <a:srgbClr val="009CD6"/>
-          </a:solidFill>
-          <a:ln>
-            <a:noFill/>
-          </a:ln>
-          <a:effectLst/>
-        </p:spPr>
-        <p:style>
-          <a:lnRef idx="1">
-            <a:schemeClr val="accent1"/>
-          </a:lnRef>
-          <a:fillRef idx="3">
-            <a:schemeClr val="accent1"/>
-          </a:fillRef>
-          <a:effectRef idx="2">
-            <a:schemeClr val="accent1"/>
-          </a:effectRef>
-          <a:fontRef idx="minor">
-            <a:schemeClr val="lt1"/>
-          </a:fontRef>
-        </p:style>
-        <p:txBody>
-          <a:bodyPr rtlCol="0" anchor="ctr" lIns="0" rIns="0" tIns="0" bIns="0" wrap="square"/>
-          <a:lstStyle/>
-          <a:p>
-            <a:pPr algn="ctr"/>
-            <a:r>
-              <a:rPr sz="1300" b="1" i="0">
-                <a:solidFill>
-                  <a:srgbClr val="FFFFFF"/>
-                </a:solidFill>
-                <a:latin typeface="Arial"/>
-              </a:rPr>
-              <a:t>1</a:t>
+              <a:t>Phase 2, Assess — find the gaps and rank them</a:t>
             </a:r>
           </a:p>
         </p:txBody>
@@ -13379,8 +11722,8 @@
         </p:nvSpPr>
         <p:spPr>
           <a:xfrm>
-            <a:off x="1115568" y="1463040"/>
-            <a:ext cx="10527487" cy="1154430"/>
+            <a:off x="822960" y="4343400"/>
+            <a:ext cx="9875520" cy="1554480"/>
           </a:xfrm>
           <a:prstGeom prst="rect">
             <a:avLst/>
@@ -13393,146 +11736,28 @@
           </a:bodyPr>
           <a:lstStyle/>
           <a:p>
-            <a:pPr>
-              <a:spcAft>
-                <a:spcPts val="300"/>
-              </a:spcAft>
-            </a:pPr>
-            <a:r>
-              <a:rPr sz="1900" b="1" i="0">
-                <a:solidFill>
-                  <a:srgbClr val="1A1A1A"/>
-                </a:solidFill>
-                <a:latin typeface="Arial"/>
-              </a:rPr>
-              <a:t>Duplicate registries</a:t>
-            </a:r>
-          </a:p>
-          <a:p>
-            <a:pPr>
-              <a:spcAft>
-                <a:spcPts val="300"/>
-              </a:spcAft>
-            </a:pPr>
-            <a:r>
-              <a:rPr sz="1550" b="0" i="0">
+            <a:r>
+              <a:rPr sz="1700" b="0" i="1">
                 <a:solidFill>
                   <a:srgbClr val="595959"/>
                 </a:solidFill>
                 <a:latin typeface="Arial"/>
               </a:rPr>
-              <a:t>Three learner lists where there should be one.</a:t>
-            </a:r>
-          </a:p>
-        </p:txBody>
-      </p:sp>
-      <p:sp>
-        <p:nvSpPr>
-          <p:cNvPr id="6" name="Rectangle 5"/>
-          <p:cNvSpPr/>
-          <p:nvPr/>
-        </p:nvSpPr>
-        <p:spPr>
-          <a:xfrm>
-            <a:off x="621792" y="2622042"/>
-            <a:ext cx="10881360" cy="12700"/>
-          </a:xfrm>
-          <a:prstGeom prst="rect">
-            <a:avLst/>
-          </a:prstGeom>
-          <a:solidFill>
-            <a:srgbClr val="DDECF4"/>
-          </a:solidFill>
-          <a:ln>
-            <a:noFill/>
-          </a:ln>
-          <a:effectLst/>
-        </p:spPr>
-        <p:style>
-          <a:lnRef idx="1">
-            <a:schemeClr val="accent1"/>
-          </a:lnRef>
-          <a:fillRef idx="3">
-            <a:schemeClr val="accent1"/>
-          </a:fillRef>
-          <a:effectRef idx="2">
-            <a:schemeClr val="accent1"/>
-          </a:effectRef>
-          <a:fontRef idx="minor">
-            <a:schemeClr val="lt1"/>
-          </a:fontRef>
-        </p:style>
-        <p:txBody>
-          <a:bodyPr rtlCol="0" anchor="ctr"/>
-          <a:lstStyle/>
-          <a:p>
-            <a:pPr algn="ctr"/>
-          </a:p>
-        </p:txBody>
-      </p:sp>
-      <p:sp>
-        <p:nvSpPr>
-          <p:cNvPr id="7" name="Oval 6"/>
-          <p:cNvSpPr/>
-          <p:nvPr/>
-        </p:nvSpPr>
-        <p:spPr>
-          <a:xfrm>
-            <a:off x="621792" y="2708910"/>
-            <a:ext cx="310896" cy="310896"/>
-          </a:xfrm>
-          <a:prstGeom prst="ellipse">
-            <a:avLst/>
-          </a:prstGeom>
-          <a:solidFill>
-            <a:srgbClr val="009CD6"/>
-          </a:solidFill>
-          <a:ln>
-            <a:noFill/>
-          </a:ln>
-          <a:effectLst/>
-        </p:spPr>
-        <p:style>
-          <a:lnRef idx="1">
-            <a:schemeClr val="accent1"/>
-          </a:lnRef>
-          <a:fillRef idx="3">
-            <a:schemeClr val="accent1"/>
-          </a:fillRef>
-          <a:effectRef idx="2">
-            <a:schemeClr val="accent1"/>
-          </a:effectRef>
-          <a:fontRef idx="minor">
-            <a:schemeClr val="lt1"/>
-          </a:fontRef>
-        </p:style>
-        <p:txBody>
-          <a:bodyPr rtlCol="0" anchor="ctr" lIns="0" rIns="0" tIns="0" bIns="0" wrap="square"/>
-          <a:lstStyle/>
-          <a:p>
-            <a:pPr algn="ctr"/>
-            <a:r>
-              <a:rPr sz="1300" b="1" i="0">
-                <a:solidFill>
-                  <a:srgbClr val="FFFFFF"/>
-                </a:solidFill>
-                <a:latin typeface="Arial"/>
-              </a:rPr>
-              <a:t>2</a:t>
-            </a:r>
-          </a:p>
-        </p:txBody>
-      </p:sp>
-      <p:sp>
-        <p:nvSpPr>
-          <p:cNvPr id="8" name="TextBox 7"/>
+              <a:t>Assess turns Progressa's picture into a ranked gap analysis — the right problems, in the right order — signed off as ground truth. It is the assessment method applied to a real sector.</a:t>
+            </a:r>
+          </a:p>
+        </p:txBody>
+      </p:sp>
+      <p:sp>
+        <p:nvSpPr>
+          <p:cNvPr id="6" name="TextBox 5"/>
           <p:cNvSpPr txBox="1"/>
           <p:nvPr/>
         </p:nvSpPr>
         <p:spPr>
           <a:xfrm>
-            <a:off x="1115568" y="2663190"/>
-            <a:ext cx="10527487" cy="1154430"/>
+            <a:off x="822960" y="5989320"/>
+            <a:ext cx="7315200" cy="365760"/>
           </a:xfrm>
           <a:prstGeom prst="rect">
             <a:avLst/>
@@ -13545,373 +11770,14 @@
           </a:bodyPr>
           <a:lstStyle/>
           <a:p>
-            <a:pPr>
-              <a:spcAft>
-                <a:spcPts val="300"/>
-              </a:spcAft>
-            </a:pPr>
-            <a:r>
-              <a:rPr sz="1900" b="1" i="0">
-                <a:solidFill>
-                  <a:srgbClr val="1A1A1A"/>
-                </a:solidFill>
-                <a:latin typeface="Arial"/>
-              </a:rPr>
-              <a:t>Identity not consumed</a:t>
-            </a:r>
-          </a:p>
-          <a:p>
-            <a:pPr>
-              <a:spcAft>
-                <a:spcPts val="300"/>
-              </a:spcAft>
-            </a:pPr>
-            <a:r>
-              <a:rPr sz="1550" b="0" i="0">
+            <a:r>
+              <a:rPr sz="1200" b="0" i="0">
                 <a:solidFill>
                   <a:srgbClr val="595959"/>
                 </a:solidFill>
                 <a:latin typeface="Arial"/>
               </a:rPr>
-              <a:t>Education re-enters identity on paper instead of using PNIA.</a:t>
-            </a:r>
-          </a:p>
-        </p:txBody>
-      </p:sp>
-      <p:sp>
-        <p:nvSpPr>
-          <p:cNvPr id="9" name="Rectangle 8"/>
-          <p:cNvSpPr/>
-          <p:nvPr/>
-        </p:nvSpPr>
-        <p:spPr>
-          <a:xfrm>
-            <a:off x="621792" y="3822191"/>
-            <a:ext cx="10881360" cy="12700"/>
-          </a:xfrm>
-          <a:prstGeom prst="rect">
-            <a:avLst/>
-          </a:prstGeom>
-          <a:solidFill>
-            <a:srgbClr val="DDECF4"/>
-          </a:solidFill>
-          <a:ln>
-            <a:noFill/>
-          </a:ln>
-          <a:effectLst/>
-        </p:spPr>
-        <p:style>
-          <a:lnRef idx="1">
-            <a:schemeClr val="accent1"/>
-          </a:lnRef>
-          <a:fillRef idx="3">
-            <a:schemeClr val="accent1"/>
-          </a:fillRef>
-          <a:effectRef idx="2">
-            <a:schemeClr val="accent1"/>
-          </a:effectRef>
-          <a:fontRef idx="minor">
-            <a:schemeClr val="lt1"/>
-          </a:fontRef>
-        </p:style>
-        <p:txBody>
-          <a:bodyPr rtlCol="0" anchor="ctr"/>
-          <a:lstStyle/>
-          <a:p>
-            <a:pPr algn="ctr"/>
-          </a:p>
-        </p:txBody>
-      </p:sp>
-      <p:sp>
-        <p:nvSpPr>
-          <p:cNvPr id="10" name="Oval 9"/>
-          <p:cNvSpPr/>
-          <p:nvPr/>
-        </p:nvSpPr>
-        <p:spPr>
-          <a:xfrm>
-            <a:off x="621792" y="3909059"/>
-            <a:ext cx="310896" cy="310896"/>
-          </a:xfrm>
-          <a:prstGeom prst="ellipse">
-            <a:avLst/>
-          </a:prstGeom>
-          <a:solidFill>
-            <a:srgbClr val="009CD6"/>
-          </a:solidFill>
-          <a:ln>
-            <a:noFill/>
-          </a:ln>
-          <a:effectLst/>
-        </p:spPr>
-        <p:style>
-          <a:lnRef idx="1">
-            <a:schemeClr val="accent1"/>
-          </a:lnRef>
-          <a:fillRef idx="3">
-            <a:schemeClr val="accent1"/>
-          </a:fillRef>
-          <a:effectRef idx="2">
-            <a:schemeClr val="accent1"/>
-          </a:effectRef>
-          <a:fontRef idx="minor">
-            <a:schemeClr val="lt1"/>
-          </a:fontRef>
-        </p:style>
-        <p:txBody>
-          <a:bodyPr rtlCol="0" anchor="ctr" lIns="0" rIns="0" tIns="0" bIns="0" wrap="square"/>
-          <a:lstStyle/>
-          <a:p>
-            <a:pPr algn="ctr"/>
-            <a:r>
-              <a:rPr sz="1300" b="1" i="0">
-                <a:solidFill>
-                  <a:srgbClr val="FFFFFF"/>
-                </a:solidFill>
-                <a:latin typeface="Arial"/>
-              </a:rPr>
-              <a:t>3</a:t>
-            </a:r>
-          </a:p>
-        </p:txBody>
-      </p:sp>
-      <p:sp>
-        <p:nvSpPr>
-          <p:cNvPr id="11" name="TextBox 10"/>
-          <p:cNvSpPr txBox="1"/>
-          <p:nvPr/>
-        </p:nvSpPr>
-        <p:spPr>
-          <a:xfrm>
-            <a:off x="1115568" y="3863339"/>
-            <a:ext cx="10527487" cy="1154430"/>
-          </a:xfrm>
-          <a:prstGeom prst="rect">
-            <a:avLst/>
-          </a:prstGeom>
-          <a:noFill/>
-        </p:spPr>
-        <p:txBody>
-          <a:bodyPr wrap="square">
-            <a:spAutoFit/>
-          </a:bodyPr>
-          <a:lstStyle/>
-          <a:p>
-            <a:pPr>
-              <a:spcAft>
-                <a:spcPts val="300"/>
-              </a:spcAft>
-            </a:pPr>
-            <a:r>
-              <a:rPr sz="1900" b="1" i="0">
-                <a:solidFill>
-                  <a:srgbClr val="1A1A1A"/>
-                </a:solidFill>
-                <a:latin typeface="Arial"/>
-              </a:rPr>
-              <a:t>No shared data exchange</a:t>
-            </a:r>
-          </a:p>
-          <a:p>
-            <a:pPr>
-              <a:spcAft>
-                <a:spcPts val="300"/>
-              </a:spcAft>
-            </a:pPr>
-            <a:r>
-              <a:rPr sz="1550" b="0" i="0">
-                <a:solidFill>
-                  <a:srgbClr val="595959"/>
-                </a:solidFill>
-                <a:latin typeface="Arial"/>
-              </a:rPr>
-              <a:t>Every link is a custom point-to-point connection or a paper form.</a:t>
-            </a:r>
-          </a:p>
-        </p:txBody>
-      </p:sp>
-      <p:sp>
-        <p:nvSpPr>
-          <p:cNvPr id="12" name="Rectangle 11"/>
-          <p:cNvSpPr/>
-          <p:nvPr/>
-        </p:nvSpPr>
-        <p:spPr>
-          <a:xfrm>
-            <a:off x="621792" y="5022342"/>
-            <a:ext cx="10881360" cy="12700"/>
-          </a:xfrm>
-          <a:prstGeom prst="rect">
-            <a:avLst/>
-          </a:prstGeom>
-          <a:solidFill>
-            <a:srgbClr val="DDECF4"/>
-          </a:solidFill>
-          <a:ln>
-            <a:noFill/>
-          </a:ln>
-          <a:effectLst/>
-        </p:spPr>
-        <p:style>
-          <a:lnRef idx="1">
-            <a:schemeClr val="accent1"/>
-          </a:lnRef>
-          <a:fillRef idx="3">
-            <a:schemeClr val="accent1"/>
-          </a:fillRef>
-          <a:effectRef idx="2">
-            <a:schemeClr val="accent1"/>
-          </a:effectRef>
-          <a:fontRef idx="minor">
-            <a:schemeClr val="lt1"/>
-          </a:fontRef>
-        </p:style>
-        <p:txBody>
-          <a:bodyPr rtlCol="0" anchor="ctr"/>
-          <a:lstStyle/>
-          <a:p>
-            <a:pPr algn="ctr"/>
-          </a:p>
-        </p:txBody>
-      </p:sp>
-      <p:sp>
-        <p:nvSpPr>
-          <p:cNvPr id="13" name="Oval 12"/>
-          <p:cNvSpPr/>
-          <p:nvPr/>
-        </p:nvSpPr>
-        <p:spPr>
-          <a:xfrm>
-            <a:off x="621792" y="5109209"/>
-            <a:ext cx="310896" cy="310896"/>
-          </a:xfrm>
-          <a:prstGeom prst="ellipse">
-            <a:avLst/>
-          </a:prstGeom>
-          <a:solidFill>
-            <a:srgbClr val="009CD6"/>
-          </a:solidFill>
-          <a:ln>
-            <a:noFill/>
-          </a:ln>
-          <a:effectLst/>
-        </p:spPr>
-        <p:style>
-          <a:lnRef idx="1">
-            <a:schemeClr val="accent1"/>
-          </a:lnRef>
-          <a:fillRef idx="3">
-            <a:schemeClr val="accent1"/>
-          </a:fillRef>
-          <a:effectRef idx="2">
-            <a:schemeClr val="accent1"/>
-          </a:effectRef>
-          <a:fontRef idx="minor">
-            <a:schemeClr val="lt1"/>
-          </a:fontRef>
-        </p:style>
-        <p:txBody>
-          <a:bodyPr rtlCol="0" anchor="ctr" lIns="0" rIns="0" tIns="0" bIns="0" wrap="square"/>
-          <a:lstStyle/>
-          <a:p>
-            <a:pPr algn="ctr"/>
-            <a:r>
-              <a:rPr sz="1300" b="1" i="0">
-                <a:solidFill>
-                  <a:srgbClr val="FFFFFF"/>
-                </a:solidFill>
-                <a:latin typeface="Arial"/>
-              </a:rPr>
-              <a:t>4</a:t>
-            </a:r>
-          </a:p>
-        </p:txBody>
-      </p:sp>
-      <p:sp>
-        <p:nvSpPr>
-          <p:cNvPr id="14" name="TextBox 13"/>
-          <p:cNvSpPr txBox="1"/>
-          <p:nvPr/>
-        </p:nvSpPr>
-        <p:spPr>
-          <a:xfrm>
-            <a:off x="1115568" y="5063490"/>
-            <a:ext cx="10527487" cy="1154430"/>
-          </a:xfrm>
-          <a:prstGeom prst="rect">
-            <a:avLst/>
-          </a:prstGeom>
-          <a:noFill/>
-        </p:spPr>
-        <p:txBody>
-          <a:bodyPr wrap="square">
-            <a:spAutoFit/>
-          </a:bodyPr>
-          <a:lstStyle/>
-          <a:p>
-            <a:pPr>
-              <a:spcAft>
-                <a:spcPts val="300"/>
-              </a:spcAft>
-            </a:pPr>
-            <a:r>
-              <a:rPr sz="1900" b="1" i="0">
-                <a:solidFill>
-                  <a:srgbClr val="1A1A1A"/>
-                </a:solidFill>
-                <a:latin typeface="Arial"/>
-              </a:rPr>
-              <a:t>No clear owner of the authoritative learner</a:t>
-            </a:r>
-          </a:p>
-          <a:p>
-            <a:pPr>
-              <a:spcAft>
-                <a:spcPts val="300"/>
-              </a:spcAft>
-            </a:pPr>
-            <a:r>
-              <a:rPr sz="1550" b="0" i="0">
-                <a:solidFill>
-                  <a:srgbClr val="595959"/>
-                </a:solidFill>
-                <a:latin typeface="Arial"/>
-              </a:rPr>
-              <a:t>Everyone uses “the learner”; nobody is accountable for the copy of record.</a:t>
-            </a:r>
-          </a:p>
-        </p:txBody>
-      </p:sp>
-      <p:sp>
-        <p:nvSpPr>
-          <p:cNvPr id="15" name="TextBox 14"/>
-          <p:cNvSpPr txBox="1"/>
-          <p:nvPr/>
-        </p:nvSpPr>
-        <p:spPr>
-          <a:xfrm>
-            <a:off x="457200" y="6473952"/>
-            <a:ext cx="7772400" cy="292608"/>
-          </a:xfrm>
-          <a:prstGeom prst="rect">
-            <a:avLst/>
-          </a:prstGeom>
-          <a:noFill/>
-        </p:spPr>
-        <p:txBody>
-          <a:bodyPr wrap="square">
-            <a:spAutoFit/>
-          </a:bodyPr>
-          <a:lstStyle/>
-          <a:p>
-            <a:r>
-              <a:rPr sz="900" b="0" i="0">
-                <a:solidFill>
-                  <a:srgbClr val="595959"/>
-                </a:solidFill>
-                <a:latin typeface="Arial"/>
-              </a:rPr>
-              <a:t>4.3 · Phase 2, Assess — find the gaps and rank them</a:t>
+              <a:t>~3 minutes · standalone video · voice-over on text slides</a:t>
             </a:r>
           </a:p>
         </p:txBody>
@@ -13936,58 +11802,14 @@
       <p:grpSpPr/>
       <p:sp>
         <p:nvSpPr>
-          <p:cNvPr id="2" name="Rectangle 1"/>
-          <p:cNvSpPr/>
-          <p:nvPr/>
-        </p:nvSpPr>
-        <p:spPr>
-          <a:xfrm>
-            <a:off x="457200" y="384048"/>
-            <a:ext cx="45720" cy="256032"/>
-          </a:xfrm>
-          <a:prstGeom prst="rect">
-            <a:avLst/>
-          </a:prstGeom>
-          <a:solidFill>
-            <a:srgbClr val="009CD6"/>
-          </a:solidFill>
-          <a:ln>
-            <a:noFill/>
-          </a:ln>
-          <a:effectLst/>
-        </p:spPr>
-        <p:style>
-          <a:lnRef idx="1">
-            <a:schemeClr val="accent1"/>
-          </a:lnRef>
-          <a:fillRef idx="3">
-            <a:schemeClr val="accent1"/>
-          </a:fillRef>
-          <a:effectRef idx="2">
-            <a:schemeClr val="accent1"/>
-          </a:effectRef>
-          <a:fontRef idx="minor">
-            <a:schemeClr val="lt1"/>
-          </a:fontRef>
-        </p:style>
-        <p:txBody>
-          <a:bodyPr rtlCol="0" anchor="ctr"/>
-          <a:lstStyle/>
-          <a:p>
-            <a:pPr algn="ctr"/>
-          </a:p>
-        </p:txBody>
-      </p:sp>
-      <p:sp>
-        <p:nvSpPr>
-          <p:cNvPr id="3" name="TextBox 2"/>
+          <p:cNvPr id="2" name="TextBox 1"/>
           <p:cNvSpPr txBox="1"/>
           <p:nvPr/>
         </p:nvSpPr>
         <p:spPr>
           <a:xfrm>
-            <a:off x="621792" y="274320"/>
-            <a:ext cx="11247120" cy="914400"/>
+            <a:off x="1005840" y="1325880"/>
+            <a:ext cx="5486400" cy="365760"/>
           </a:xfrm>
           <a:prstGeom prst="rect">
             <a:avLst/>
@@ -14001,13 +11823,47 @@
           <a:lstStyle/>
           <a:p>
             <a:r>
-              <a:rPr sz="2800" b="1" i="0">
+              <a:rPr sz="1200" b="1" i="0">
+                <a:solidFill>
+                  <a:srgbClr val="006E96"/>
+                </a:solidFill>
+                <a:latin typeface="Arial"/>
+              </a:rPr>
+              <a:t>WHERE WE START</a:t>
+            </a:r>
+          </a:p>
+        </p:txBody>
+      </p:sp>
+      <p:sp>
+        <p:nvSpPr>
+          <p:cNvPr id="3" name="TextBox 2"/>
+          <p:cNvSpPr txBox="1"/>
+          <p:nvPr/>
+        </p:nvSpPr>
+        <p:spPr>
+          <a:xfrm>
+            <a:off x="1005840" y="1783080"/>
+            <a:ext cx="10149840" cy="1737360"/>
+          </a:xfrm>
+          <a:prstGeom prst="rect">
+            <a:avLst/>
+          </a:prstGeom>
+          <a:noFill/>
+        </p:spPr>
+        <p:txBody>
+          <a:bodyPr wrap="square">
+            <a:spAutoFit/>
+          </a:bodyPr>
+          <a:lstStyle/>
+          <a:p>
+            <a:r>
+              <a:rPr sz="3000" b="1" i="0">
                 <a:solidFill>
                   <a:srgbClr val="1A1A1A"/>
                 </a:solidFill>
                 <a:latin typeface="Arial"/>
               </a:rPr>
-              <a:t>The duplicate learner registry tops the list — it hurts most and it can move</a:t>
+              <a:t>Phase 2 — Assess. Now you judge.</a:t>
             </a:r>
           </a:p>
         </p:txBody>
@@ -14020,8 +11876,8 @@
         </p:nvSpPr>
         <p:spPr>
           <a:xfrm>
-            <a:off x="658368" y="1600200"/>
-            <a:ext cx="10881360" cy="2651760"/>
+            <a:off x="1005840" y="3611880"/>
+            <a:ext cx="10149840" cy="2377440"/>
           </a:xfrm>
           <a:prstGeom prst="rect">
             <a:avLst/>
@@ -14036,125 +11892,56 @@
           <a:p>
             <a:pPr>
               <a:spcAft>
-                <a:spcPts val="1200"/>
+                <a:spcPts val="800"/>
               </a:spcAft>
             </a:pPr>
             <a:r>
-              <a:rPr sz="2000" b="0" i="0">
+              <a:rPr sz="1700" b="0" i="0">
                 <a:solidFill>
-                  <a:srgbClr val="1A1A1A"/>
+                  <a:srgbClr val="595959"/>
                 </a:solidFill>
                 <a:latin typeface="Arial"/>
               </a:rPr>
-              <a:t>Score each gap by how much it hurts and how hard it is to close. On Progressa the duplicate learner registry tops the list: it is the direct cause of the minister's stalled promise, it burdens every parent, and it is closable — make the Learner Registry authoritative and have the others consume it.</a:t>
+              <a:t>What is the gap between where Progressa is and where it needs to be?</a:t>
             </a:r>
           </a:p>
           <a:p>
             <a:pPr>
               <a:spcAft>
-                <a:spcPts val="1200"/>
+                <a:spcPts val="800"/>
               </a:spcAft>
             </a:pPr>
             <a:r>
-              <a:rPr sz="2000" b="0" i="0">
+              <a:rPr sz="1700" b="0" i="0">
                 <a:solidFill>
-                  <a:srgbClr val="1A1A1A"/>
+                  <a:srgbClr val="595959"/>
                 </a:solidFill>
                 <a:latin typeface="Arial"/>
               </a:rPr>
-              <a:t>The no-data-exchange gap is high impact but harder, so it sequences later.</a:t>
-            </a:r>
-          </a:p>
-        </p:txBody>
-      </p:sp>
-      <p:sp>
-        <p:nvSpPr>
-          <p:cNvPr id="5" name="Rounded Rectangle 4"/>
-          <p:cNvSpPr/>
-          <p:nvPr/>
-        </p:nvSpPr>
-        <p:spPr>
-          <a:xfrm>
-            <a:off x="658368" y="4434840"/>
-            <a:ext cx="10881360" cy="1325880"/>
-          </a:xfrm>
-          <a:prstGeom prst="roundRect">
-            <a:avLst>
-              <a:gd name="adj" fmla="val 4500"/>
-            </a:avLst>
-          </a:prstGeom>
-          <a:solidFill>
-            <a:srgbClr val="E5F5FB"/>
-          </a:solidFill>
-          <a:ln>
-            <a:noFill/>
-          </a:ln>
-          <a:effectLst/>
-        </p:spPr>
-        <p:style>
-          <a:lnRef idx="1">
-            <a:schemeClr val="accent1"/>
-          </a:lnRef>
-          <a:fillRef idx="3">
-            <a:schemeClr val="accent1"/>
-          </a:fillRef>
-          <a:effectRef idx="2">
-            <a:schemeClr val="accent1"/>
-          </a:effectRef>
-          <a:fontRef idx="minor">
-            <a:schemeClr val="lt1"/>
-          </a:fontRef>
-        </p:style>
-        <p:txBody>
-          <a:bodyPr rtlCol="0" anchor="ctr"/>
-          <a:lstStyle/>
-          <a:p>
-            <a:pPr algn="ctr"/>
-          </a:p>
-        </p:txBody>
-      </p:sp>
-      <p:sp>
-        <p:nvSpPr>
-          <p:cNvPr id="6" name="TextBox 5"/>
-          <p:cNvSpPr txBox="1"/>
-          <p:nvPr/>
-        </p:nvSpPr>
-        <p:spPr>
-          <a:xfrm>
-            <a:off x="859536" y="4626864"/>
-            <a:ext cx="10479024" cy="1051560"/>
-          </a:xfrm>
-          <a:prstGeom prst="rect">
-            <a:avLst/>
-          </a:prstGeom>
-          <a:noFill/>
-        </p:spPr>
-        <p:txBody>
-          <a:bodyPr wrap="square">
-            <a:spAutoFit/>
-          </a:bodyPr>
-          <a:lstStyle/>
+              <a:t>The current state in four layers, maturity scorecards, and a gap analysis that ranks the problems.</a:t>
+            </a:r>
+          </a:p>
           <a:p>
             <a:pPr>
               <a:spcAft>
-                <a:spcPts val="700"/>
+                <a:spcPts val="800"/>
               </a:spcAft>
             </a:pPr>
             <a:r>
-              <a:rPr sz="2300" b="1" i="0">
+              <a:rPr sz="1700" b="0" i="0">
                 <a:solidFill>
-                  <a:srgbClr val="006E96"/>
+                  <a:srgbClr val="595959"/>
                 </a:solidFill>
                 <a:latin typeface="Arial"/>
               </a:rPr>
-              <a:t>Rank by impact where movement is possible.</a:t>
-            </a:r>
-          </a:p>
-        </p:txBody>
-      </p:sp>
-      <p:sp>
-        <p:nvSpPr>
-          <p:cNvPr id="7" name="TextBox 6"/>
+              <a:t>About six to eight weeks.</a:t>
+            </a:r>
+          </a:p>
+        </p:txBody>
+      </p:sp>
+      <p:sp>
+        <p:nvSpPr>
+          <p:cNvPr id="5" name="TextBox 4"/>
           <p:cNvSpPr txBox="1"/>
           <p:nvPr/>
         </p:nvSpPr>
@@ -14182,6 +11969,41 @@
                 <a:latin typeface="Arial"/>
               </a:rPr>
               <a:t>4.3 · Phase 2, Assess — find the gaps and rank them</a:t>
+            </a:r>
+          </a:p>
+        </p:txBody>
+      </p:sp>
+      <p:sp>
+        <p:nvSpPr>
+          <p:cNvPr id="6" name="TextBox 5"/>
+          <p:cNvSpPr txBox="1"/>
+          <p:nvPr/>
+        </p:nvSpPr>
+        <p:spPr>
+          <a:xfrm>
+            <a:off x="10058400" y="6473952"/>
+            <a:ext cx="1673352" cy="292608"/>
+          </a:xfrm>
+          <a:prstGeom prst="rect">
+            <a:avLst/>
+          </a:prstGeom>
+          <a:noFill/>
+        </p:spPr>
+        <p:txBody>
+          <a:bodyPr wrap="square">
+            <a:spAutoFit/>
+          </a:bodyPr>
+          <a:lstStyle/>
+          <a:p>
+            <a:pPr algn="r"/>
+            <a:r>
+              <a:rPr sz="900" b="0" i="0">
+                <a:solidFill>
+                  <a:srgbClr val="595959"/>
+                </a:solidFill>
+                <a:latin typeface="Arial"/>
+              </a:rPr>
+              <a:t>www.itu.int</a:t>
             </a:r>
           </a:p>
         </p:txBody>
@@ -14277,84 +12099,27 @@
                 </a:solidFill>
                 <a:latin typeface="Arial"/>
               </a:rPr>
-              <a:t>Sign-off two carries an honesty test you can fail quietly</a:t>
-            </a:r>
-          </a:p>
-        </p:txBody>
-      </p:sp>
-      <p:sp>
-        <p:nvSpPr>
-          <p:cNvPr id="4" name="TextBox 3"/>
-          <p:cNvSpPr txBox="1"/>
+              <a:t>Score the capabilities and “things are bad” becomes a map</a:t>
+            </a:r>
+          </a:p>
+        </p:txBody>
+      </p:sp>
+      <p:sp>
+        <p:nvSpPr>
+          <p:cNvPr id="4" name="Oval 3"/>
+          <p:cNvSpPr/>
           <p:nvPr/>
         </p:nvSpPr>
         <p:spPr>
           <a:xfrm>
-            <a:off x="658368" y="1600200"/>
-            <a:ext cx="10881360" cy="1965960"/>
-          </a:xfrm>
-          <a:prstGeom prst="rect">
+            <a:off x="621792" y="1508760"/>
+            <a:ext cx="310896" cy="310896"/>
+          </a:xfrm>
+          <a:prstGeom prst="ellipse">
             <a:avLst/>
           </a:prstGeom>
-          <a:noFill/>
-        </p:spPr>
-        <p:txBody>
-          <a:bodyPr wrap="square">
-            <a:spAutoFit/>
-          </a:bodyPr>
-          <a:lstStyle/>
-          <a:p>
-            <a:pPr>
-              <a:spcAft>
-                <a:spcPts val="1200"/>
-              </a:spcAft>
-            </a:pPr>
-            <a:r>
-              <a:rPr sz="2000" b="0" i="0">
-                <a:solidFill>
-                  <a:srgbClr val="1A1A1A"/>
-                </a:solidFill>
-                <a:latin typeface="Arial"/>
-              </a:rPr>
-              <a:t>On Progressa, one of the three learner lists is owned by a powerful programme that does not want to give it up.</a:t>
-            </a:r>
-          </a:p>
-          <a:p>
-            <a:pPr>
-              <a:spcAft>
-                <a:spcPts val="1200"/>
-              </a:spcAft>
-            </a:pPr>
-            <a:r>
-              <a:rPr sz="2000" b="0" i="0">
-                <a:solidFill>
-                  <a:srgbClr val="1A1A1A"/>
-                </a:solidFill>
-                <a:latin typeface="Arial"/>
-              </a:rPr>
-              <a:t>The gap analysis must reflect ground truth — including that one.</a:t>
-            </a:r>
-          </a:p>
-        </p:txBody>
-      </p:sp>
-      <p:sp>
-        <p:nvSpPr>
-          <p:cNvPr id="5" name="Rounded Rectangle 4"/>
-          <p:cNvSpPr/>
-          <p:nvPr/>
-        </p:nvSpPr>
-        <p:spPr>
-          <a:xfrm>
-            <a:off x="658368" y="3749039"/>
-            <a:ext cx="10881360" cy="1325880"/>
-          </a:xfrm>
-          <a:prstGeom prst="roundRect">
-            <a:avLst>
-              <a:gd name="adj" fmla="val 4500"/>
-            </a:avLst>
-          </a:prstGeom>
           <a:solidFill>
-            <a:srgbClr val="E5F5FB"/>
+            <a:srgbClr val="009CD6"/>
           </a:solidFill>
           <a:ln>
             <a:noFill/>
@@ -14376,23 +12141,32 @@
           </a:fontRef>
         </p:style>
         <p:txBody>
-          <a:bodyPr rtlCol="0" anchor="ctr"/>
+          <a:bodyPr rtlCol="0" anchor="ctr" lIns="0" rIns="0" tIns="0" bIns="0" wrap="square"/>
           <a:lstStyle/>
           <a:p>
             <a:pPr algn="ctr"/>
-          </a:p>
-        </p:txBody>
-      </p:sp>
-      <p:sp>
-        <p:nvSpPr>
-          <p:cNvPr id="6" name="TextBox 5"/>
+            <a:r>
+              <a:rPr sz="1300" b="1" i="0">
+                <a:solidFill>
+                  <a:srgbClr val="FFFFFF"/>
+                </a:solidFill>
+                <a:latin typeface="Arial"/>
+              </a:rPr>
+              <a:t>1</a:t>
+            </a:r>
+          </a:p>
+        </p:txBody>
+      </p:sp>
+      <p:sp>
+        <p:nvSpPr>
+          <p:cNvPr id="5" name="TextBox 4"/>
           <p:cNvSpPr txBox="1"/>
           <p:nvPr/>
         </p:nvSpPr>
         <p:spPr>
           <a:xfrm>
-            <a:off x="859536" y="3941063"/>
-            <a:ext cx="10479024" cy="1051560"/>
+            <a:off x="1115568" y="1463040"/>
+            <a:ext cx="10527487" cy="1028699"/>
           </a:xfrm>
           <a:prstGeom prst="rect">
             <a:avLst/>
@@ -14407,24 +12181,530 @@
           <a:p>
             <a:pPr>
               <a:spcAft>
-                <a:spcPts val="700"/>
+                <a:spcPts val="300"/>
               </a:spcAft>
             </a:pPr>
             <a:r>
-              <a:rPr sz="2300" b="1" i="0">
+              <a:rPr sz="1900" b="1" i="0">
+                <a:solidFill>
+                  <a:srgbClr val="1A1A1A"/>
+                </a:solidFill>
+                <a:latin typeface="Arial"/>
+              </a:rPr>
+              <a:t>Register a learner — LOW</a:t>
+            </a:r>
+          </a:p>
+          <a:p>
+            <a:pPr>
+              <a:spcAft>
+                <a:spcPts val="300"/>
+              </a:spcAft>
+            </a:pPr>
+            <a:r>
+              <a:rPr sz="1550" b="0" i="0">
+                <a:solidFill>
+                  <a:srgbClr val="595959"/>
+                </a:solidFill>
+                <a:latin typeface="Arial"/>
+              </a:rPr>
+              <a:t>Three lists, none of them authoritative.</a:t>
+            </a:r>
+          </a:p>
+        </p:txBody>
+      </p:sp>
+      <p:sp>
+        <p:nvSpPr>
+          <p:cNvPr id="6" name="Rectangle 5"/>
+          <p:cNvSpPr/>
+          <p:nvPr/>
+        </p:nvSpPr>
+        <p:spPr>
+          <a:xfrm>
+            <a:off x="621792" y="2496312"/>
+            <a:ext cx="10881360" cy="12700"/>
+          </a:xfrm>
+          <a:prstGeom prst="rect">
+            <a:avLst/>
+          </a:prstGeom>
+          <a:solidFill>
+            <a:srgbClr val="DDECF4"/>
+          </a:solidFill>
+          <a:ln>
+            <a:noFill/>
+          </a:ln>
+          <a:effectLst/>
+        </p:spPr>
+        <p:style>
+          <a:lnRef idx="1">
+            <a:schemeClr val="accent1"/>
+          </a:lnRef>
+          <a:fillRef idx="3">
+            <a:schemeClr val="accent1"/>
+          </a:fillRef>
+          <a:effectRef idx="2">
+            <a:schemeClr val="accent1"/>
+          </a:effectRef>
+          <a:fontRef idx="minor">
+            <a:schemeClr val="lt1"/>
+          </a:fontRef>
+        </p:style>
+        <p:txBody>
+          <a:bodyPr rtlCol="0" anchor="ctr"/>
+          <a:lstStyle/>
+          <a:p>
+            <a:pPr algn="ctr"/>
+          </a:p>
+        </p:txBody>
+      </p:sp>
+      <p:sp>
+        <p:nvSpPr>
+          <p:cNvPr id="7" name="Oval 6"/>
+          <p:cNvSpPr/>
+          <p:nvPr/>
+        </p:nvSpPr>
+        <p:spPr>
+          <a:xfrm>
+            <a:off x="621792" y="2583179"/>
+            <a:ext cx="310896" cy="310896"/>
+          </a:xfrm>
+          <a:prstGeom prst="ellipse">
+            <a:avLst/>
+          </a:prstGeom>
+          <a:solidFill>
+            <a:srgbClr val="009CD6"/>
+          </a:solidFill>
+          <a:ln>
+            <a:noFill/>
+          </a:ln>
+          <a:effectLst/>
+        </p:spPr>
+        <p:style>
+          <a:lnRef idx="1">
+            <a:schemeClr val="accent1"/>
+          </a:lnRef>
+          <a:fillRef idx="3">
+            <a:schemeClr val="accent1"/>
+          </a:fillRef>
+          <a:effectRef idx="2">
+            <a:schemeClr val="accent1"/>
+          </a:effectRef>
+          <a:fontRef idx="minor">
+            <a:schemeClr val="lt1"/>
+          </a:fontRef>
+        </p:style>
+        <p:txBody>
+          <a:bodyPr rtlCol="0" anchor="ctr" lIns="0" rIns="0" tIns="0" bIns="0" wrap="square"/>
+          <a:lstStyle/>
+          <a:p>
+            <a:pPr algn="ctr"/>
+            <a:r>
+              <a:rPr sz="1300" b="1" i="0">
+                <a:solidFill>
+                  <a:srgbClr val="FFFFFF"/>
+                </a:solidFill>
+                <a:latin typeface="Arial"/>
+              </a:rPr>
+              <a:t>2</a:t>
+            </a:r>
+          </a:p>
+        </p:txBody>
+      </p:sp>
+      <p:sp>
+        <p:nvSpPr>
+          <p:cNvPr id="8" name="TextBox 7"/>
+          <p:cNvSpPr txBox="1"/>
+          <p:nvPr/>
+        </p:nvSpPr>
+        <p:spPr>
+          <a:xfrm>
+            <a:off x="1115568" y="2537460"/>
+            <a:ext cx="10527487" cy="1028699"/>
+          </a:xfrm>
+          <a:prstGeom prst="rect">
+            <a:avLst/>
+          </a:prstGeom>
+          <a:noFill/>
+        </p:spPr>
+        <p:txBody>
+          <a:bodyPr wrap="square">
+            <a:spAutoFit/>
+          </a:bodyPr>
+          <a:lstStyle/>
+          <a:p>
+            <a:pPr>
+              <a:spcAft>
+                <a:spcPts val="300"/>
+              </a:spcAft>
+            </a:pPr>
+            <a:r>
+              <a:rPr sz="1900" b="1" i="0">
+                <a:solidFill>
+                  <a:srgbClr val="1A1A1A"/>
+                </a:solidFill>
+                <a:latin typeface="Arial"/>
+              </a:rPr>
+              <a:t>Prove identity — MEDIUM</a:t>
+            </a:r>
+          </a:p>
+          <a:p>
+            <a:pPr>
+              <a:spcAft>
+                <a:spcPts val="300"/>
+              </a:spcAft>
+            </a:pPr>
+            <a:r>
+              <a:rPr sz="1550" b="0" i="0">
+                <a:solidFill>
+                  <a:srgbClr val="595959"/>
+                </a:solidFill>
+                <a:latin typeface="Arial"/>
+              </a:rPr>
+              <a:t>PNIA exists; education does not consume it.</a:t>
+            </a:r>
+          </a:p>
+        </p:txBody>
+      </p:sp>
+      <p:sp>
+        <p:nvSpPr>
+          <p:cNvPr id="9" name="Rectangle 8"/>
+          <p:cNvSpPr/>
+          <p:nvPr/>
+        </p:nvSpPr>
+        <p:spPr>
+          <a:xfrm>
+            <a:off x="621792" y="3570732"/>
+            <a:ext cx="10881360" cy="12700"/>
+          </a:xfrm>
+          <a:prstGeom prst="rect">
+            <a:avLst/>
+          </a:prstGeom>
+          <a:solidFill>
+            <a:srgbClr val="DDECF4"/>
+          </a:solidFill>
+          <a:ln>
+            <a:noFill/>
+          </a:ln>
+          <a:effectLst/>
+        </p:spPr>
+        <p:style>
+          <a:lnRef idx="1">
+            <a:schemeClr val="accent1"/>
+          </a:lnRef>
+          <a:fillRef idx="3">
+            <a:schemeClr val="accent1"/>
+          </a:fillRef>
+          <a:effectRef idx="2">
+            <a:schemeClr val="accent1"/>
+          </a:effectRef>
+          <a:fontRef idx="minor">
+            <a:schemeClr val="lt1"/>
+          </a:fontRef>
+        </p:style>
+        <p:txBody>
+          <a:bodyPr rtlCol="0" anchor="ctr"/>
+          <a:lstStyle/>
+          <a:p>
+            <a:pPr algn="ctr"/>
+          </a:p>
+        </p:txBody>
+      </p:sp>
+      <p:sp>
+        <p:nvSpPr>
+          <p:cNvPr id="10" name="Oval 9"/>
+          <p:cNvSpPr/>
+          <p:nvPr/>
+        </p:nvSpPr>
+        <p:spPr>
+          <a:xfrm>
+            <a:off x="621792" y="3657599"/>
+            <a:ext cx="310896" cy="310896"/>
+          </a:xfrm>
+          <a:prstGeom prst="ellipse">
+            <a:avLst/>
+          </a:prstGeom>
+          <a:solidFill>
+            <a:srgbClr val="009CD6"/>
+          </a:solidFill>
+          <a:ln>
+            <a:noFill/>
+          </a:ln>
+          <a:effectLst/>
+        </p:spPr>
+        <p:style>
+          <a:lnRef idx="1">
+            <a:schemeClr val="accent1"/>
+          </a:lnRef>
+          <a:fillRef idx="3">
+            <a:schemeClr val="accent1"/>
+          </a:fillRef>
+          <a:effectRef idx="2">
+            <a:schemeClr val="accent1"/>
+          </a:effectRef>
+          <a:fontRef idx="minor">
+            <a:schemeClr val="lt1"/>
+          </a:fontRef>
+        </p:style>
+        <p:txBody>
+          <a:bodyPr rtlCol="0" anchor="ctr" lIns="0" rIns="0" tIns="0" bIns="0" wrap="square"/>
+          <a:lstStyle/>
+          <a:p>
+            <a:pPr algn="ctr"/>
+            <a:r>
+              <a:rPr sz="1300" b="1" i="0">
+                <a:solidFill>
+                  <a:srgbClr val="FFFFFF"/>
+                </a:solidFill>
+                <a:latin typeface="Arial"/>
+              </a:rPr>
+              <a:t>3</a:t>
+            </a:r>
+          </a:p>
+        </p:txBody>
+      </p:sp>
+      <p:sp>
+        <p:nvSpPr>
+          <p:cNvPr id="11" name="TextBox 10"/>
+          <p:cNvSpPr txBox="1"/>
+          <p:nvPr/>
+        </p:nvSpPr>
+        <p:spPr>
+          <a:xfrm>
+            <a:off x="1115568" y="3611879"/>
+            <a:ext cx="10527487" cy="1028699"/>
+          </a:xfrm>
+          <a:prstGeom prst="rect">
+            <a:avLst/>
+          </a:prstGeom>
+          <a:noFill/>
+        </p:spPr>
+        <p:txBody>
+          <a:bodyPr wrap="square">
+            <a:spAutoFit/>
+          </a:bodyPr>
+          <a:lstStyle/>
+          <a:p>
+            <a:pPr>
+              <a:spcAft>
+                <a:spcPts val="300"/>
+              </a:spcAft>
+            </a:pPr>
+            <a:r>
+              <a:rPr sz="1900" b="1" i="0">
+                <a:solidFill>
+                  <a:srgbClr val="1A1A1A"/>
+                </a:solidFill>
+                <a:latin typeface="Arial"/>
+              </a:rPr>
+              <a:t>Certify a result — HIGH</a:t>
+            </a:r>
+          </a:p>
+          <a:p>
+            <a:pPr>
+              <a:spcAft>
+                <a:spcPts val="300"/>
+              </a:spcAft>
+            </a:pPr>
+            <a:r>
+              <a:rPr sz="1550" b="0" i="0">
+                <a:solidFill>
+                  <a:srgbClr val="595959"/>
+                </a:solidFill>
+                <a:latin typeface="Arial"/>
+              </a:rPr>
+              <a:t>The Examination Authority does this well.</a:t>
+            </a:r>
+          </a:p>
+        </p:txBody>
+      </p:sp>
+      <p:sp>
+        <p:nvSpPr>
+          <p:cNvPr id="12" name="Rectangle 11"/>
+          <p:cNvSpPr/>
+          <p:nvPr/>
+        </p:nvSpPr>
+        <p:spPr>
+          <a:xfrm>
+            <a:off x="621792" y="4645152"/>
+            <a:ext cx="10881360" cy="12700"/>
+          </a:xfrm>
+          <a:prstGeom prst="rect">
+            <a:avLst/>
+          </a:prstGeom>
+          <a:solidFill>
+            <a:srgbClr val="DDECF4"/>
+          </a:solidFill>
+          <a:ln>
+            <a:noFill/>
+          </a:ln>
+          <a:effectLst/>
+        </p:spPr>
+        <p:style>
+          <a:lnRef idx="1">
+            <a:schemeClr val="accent1"/>
+          </a:lnRef>
+          <a:fillRef idx="3">
+            <a:schemeClr val="accent1"/>
+          </a:fillRef>
+          <a:effectRef idx="2">
+            <a:schemeClr val="accent1"/>
+          </a:effectRef>
+          <a:fontRef idx="minor">
+            <a:schemeClr val="lt1"/>
+          </a:fontRef>
+        </p:style>
+        <p:txBody>
+          <a:bodyPr rtlCol="0" anchor="ctr"/>
+          <a:lstStyle/>
+          <a:p>
+            <a:pPr algn="ctr"/>
+          </a:p>
+        </p:txBody>
+      </p:sp>
+      <p:sp>
+        <p:nvSpPr>
+          <p:cNvPr id="13" name="Oval 12"/>
+          <p:cNvSpPr/>
+          <p:nvPr/>
+        </p:nvSpPr>
+        <p:spPr>
+          <a:xfrm>
+            <a:off x="621792" y="4732020"/>
+            <a:ext cx="310896" cy="310896"/>
+          </a:xfrm>
+          <a:prstGeom prst="ellipse">
+            <a:avLst/>
+          </a:prstGeom>
+          <a:solidFill>
+            <a:srgbClr val="009CD6"/>
+          </a:solidFill>
+          <a:ln>
+            <a:noFill/>
+          </a:ln>
+          <a:effectLst/>
+        </p:spPr>
+        <p:style>
+          <a:lnRef idx="1">
+            <a:schemeClr val="accent1"/>
+          </a:lnRef>
+          <a:fillRef idx="3">
+            <a:schemeClr val="accent1"/>
+          </a:fillRef>
+          <a:effectRef idx="2">
+            <a:schemeClr val="accent1"/>
+          </a:effectRef>
+          <a:fontRef idx="minor">
+            <a:schemeClr val="lt1"/>
+          </a:fontRef>
+        </p:style>
+        <p:txBody>
+          <a:bodyPr rtlCol="0" anchor="ctr" lIns="0" rIns="0" tIns="0" bIns="0" wrap="square"/>
+          <a:lstStyle/>
+          <a:p>
+            <a:pPr algn="ctr"/>
+            <a:r>
+              <a:rPr sz="1300" b="1" i="0">
+                <a:solidFill>
+                  <a:srgbClr val="FFFFFF"/>
+                </a:solidFill>
+                <a:latin typeface="Arial"/>
+              </a:rPr>
+              <a:t>4</a:t>
+            </a:r>
+          </a:p>
+        </p:txBody>
+      </p:sp>
+      <p:sp>
+        <p:nvSpPr>
+          <p:cNvPr id="14" name="TextBox 13"/>
+          <p:cNvSpPr txBox="1"/>
+          <p:nvPr/>
+        </p:nvSpPr>
+        <p:spPr>
+          <a:xfrm>
+            <a:off x="1115568" y="4686300"/>
+            <a:ext cx="10527487" cy="1028699"/>
+          </a:xfrm>
+          <a:prstGeom prst="rect">
+            <a:avLst/>
+          </a:prstGeom>
+          <a:noFill/>
+        </p:spPr>
+        <p:txBody>
+          <a:bodyPr wrap="square">
+            <a:spAutoFit/>
+          </a:bodyPr>
+          <a:lstStyle/>
+          <a:p>
+            <a:pPr>
+              <a:spcAft>
+                <a:spcPts val="300"/>
+              </a:spcAft>
+            </a:pPr>
+            <a:r>
+              <a:rPr sz="1900" b="1" i="0">
+                <a:solidFill>
+                  <a:srgbClr val="1A1A1A"/>
+                </a:solidFill>
+                <a:latin typeface="Arial"/>
+              </a:rPr>
+              <a:t>Share data across bodies — VERY LOW</a:t>
+            </a:r>
+          </a:p>
+          <a:p>
+            <a:pPr>
+              <a:spcAft>
+                <a:spcPts val="300"/>
+              </a:spcAft>
+            </a:pPr>
+            <a:r>
+              <a:rPr sz="1550" b="0" i="0">
+                <a:solidFill>
+                  <a:srgbClr val="595959"/>
+                </a:solidFill>
+                <a:latin typeface="Arial"/>
+              </a:rPr>
+              <a:t>Almost everything still moves on paper.</a:t>
+            </a:r>
+          </a:p>
+        </p:txBody>
+      </p:sp>
+      <p:sp>
+        <p:nvSpPr>
+          <p:cNvPr id="15" name="TextBox 14"/>
+          <p:cNvSpPr txBox="1"/>
+          <p:nvPr/>
+        </p:nvSpPr>
+        <p:spPr>
+          <a:xfrm>
+            <a:off x="658368" y="5870448"/>
+            <a:ext cx="10881360" cy="548640"/>
+          </a:xfrm>
+          <a:prstGeom prst="rect">
+            <a:avLst/>
+          </a:prstGeom>
+          <a:noFill/>
+        </p:spPr>
+        <p:txBody>
+          <a:bodyPr wrap="square">
+            <a:spAutoFit/>
+          </a:bodyPr>
+          <a:lstStyle/>
+          <a:p>
+            <a:r>
+              <a:rPr sz="1550" b="1" i="0">
                 <a:solidFill>
                   <a:srgbClr val="006E96"/>
                 </a:solidFill>
                 <a:latin typeface="Arial"/>
               </a:rPr>
-              <a:t>An assessment that softens that gap fails — quietly, a year later.</a:t>
-            </a:r>
-          </a:p>
-        </p:txBody>
-      </p:sp>
-      <p:sp>
-        <p:nvSpPr>
-          <p:cNvPr id="7" name="TextBox 6"/>
+              <a:t>Not everything is broken. Knowing exactly which part is, is the point.</a:t>
+            </a:r>
+          </a:p>
+        </p:txBody>
+      </p:sp>
+      <p:sp>
+        <p:nvSpPr>
+          <p:cNvPr id="16" name="TextBox 15"/>
           <p:cNvSpPr txBox="1"/>
           <p:nvPr/>
         </p:nvSpPr>
@@ -14476,6 +12756,1240 @@
       <p:grpSpPr/>
       <p:sp>
         <p:nvSpPr>
+          <p:cNvPr id="2" name="Rectangle 1"/>
+          <p:cNvSpPr/>
+          <p:nvPr/>
+        </p:nvSpPr>
+        <p:spPr>
+          <a:xfrm>
+            <a:off x="457200" y="384048"/>
+            <a:ext cx="45720" cy="256032"/>
+          </a:xfrm>
+          <a:prstGeom prst="rect">
+            <a:avLst/>
+          </a:prstGeom>
+          <a:solidFill>
+            <a:srgbClr val="009CD6"/>
+          </a:solidFill>
+          <a:ln>
+            <a:noFill/>
+          </a:ln>
+          <a:effectLst/>
+        </p:spPr>
+        <p:style>
+          <a:lnRef idx="1">
+            <a:schemeClr val="accent1"/>
+          </a:lnRef>
+          <a:fillRef idx="3">
+            <a:schemeClr val="accent1"/>
+          </a:fillRef>
+          <a:effectRef idx="2">
+            <a:schemeClr val="accent1"/>
+          </a:effectRef>
+          <a:fontRef idx="minor">
+            <a:schemeClr val="lt1"/>
+          </a:fontRef>
+        </p:style>
+        <p:txBody>
+          <a:bodyPr rtlCol="0" anchor="ctr"/>
+          <a:lstStyle/>
+          <a:p>
+            <a:pPr algn="ctr"/>
+          </a:p>
+        </p:txBody>
+      </p:sp>
+      <p:sp>
+        <p:nvSpPr>
+          <p:cNvPr id="3" name="TextBox 2"/>
+          <p:cNvSpPr txBox="1"/>
+          <p:nvPr/>
+        </p:nvSpPr>
+        <p:spPr>
+          <a:xfrm>
+            <a:off x="621792" y="274320"/>
+            <a:ext cx="11247120" cy="914400"/>
+          </a:xfrm>
+          <a:prstGeom prst="rect">
+            <a:avLst/>
+          </a:prstGeom>
+          <a:noFill/>
+        </p:spPr>
+        <p:txBody>
+          <a:bodyPr wrap="square">
+            <a:spAutoFit/>
+          </a:bodyPr>
+          <a:lstStyle/>
+          <a:p>
+            <a:r>
+              <a:rPr sz="2800" b="1" i="0">
+                <a:solidFill>
+                  <a:srgbClr val="1A1A1A"/>
+                </a:solidFill>
+                <a:latin typeface="Arial"/>
+              </a:rPr>
+              <a:t>Four gaps surface on Progressa — and one has no owner</a:t>
+            </a:r>
+          </a:p>
+        </p:txBody>
+      </p:sp>
+      <p:sp>
+        <p:nvSpPr>
+          <p:cNvPr id="4" name="Oval 3"/>
+          <p:cNvSpPr/>
+          <p:nvPr/>
+        </p:nvSpPr>
+        <p:spPr>
+          <a:xfrm>
+            <a:off x="621792" y="1508760"/>
+            <a:ext cx="310896" cy="310896"/>
+          </a:xfrm>
+          <a:prstGeom prst="ellipse">
+            <a:avLst/>
+          </a:prstGeom>
+          <a:solidFill>
+            <a:srgbClr val="009CD6"/>
+          </a:solidFill>
+          <a:ln>
+            <a:noFill/>
+          </a:ln>
+          <a:effectLst/>
+        </p:spPr>
+        <p:style>
+          <a:lnRef idx="1">
+            <a:schemeClr val="accent1"/>
+          </a:lnRef>
+          <a:fillRef idx="3">
+            <a:schemeClr val="accent1"/>
+          </a:fillRef>
+          <a:effectRef idx="2">
+            <a:schemeClr val="accent1"/>
+          </a:effectRef>
+          <a:fontRef idx="minor">
+            <a:schemeClr val="lt1"/>
+          </a:fontRef>
+        </p:style>
+        <p:txBody>
+          <a:bodyPr rtlCol="0" anchor="ctr" lIns="0" rIns="0" tIns="0" bIns="0" wrap="square"/>
+          <a:lstStyle/>
+          <a:p>
+            <a:pPr algn="ctr"/>
+            <a:r>
+              <a:rPr sz="1300" b="1" i="0">
+                <a:solidFill>
+                  <a:srgbClr val="FFFFFF"/>
+                </a:solidFill>
+                <a:latin typeface="Arial"/>
+              </a:rPr>
+              <a:t>1</a:t>
+            </a:r>
+          </a:p>
+        </p:txBody>
+      </p:sp>
+      <p:sp>
+        <p:nvSpPr>
+          <p:cNvPr id="5" name="TextBox 4"/>
+          <p:cNvSpPr txBox="1"/>
+          <p:nvPr/>
+        </p:nvSpPr>
+        <p:spPr>
+          <a:xfrm>
+            <a:off x="1115568" y="1463040"/>
+            <a:ext cx="10527487" cy="1154430"/>
+          </a:xfrm>
+          <a:prstGeom prst="rect">
+            <a:avLst/>
+          </a:prstGeom>
+          <a:noFill/>
+        </p:spPr>
+        <p:txBody>
+          <a:bodyPr wrap="square">
+            <a:spAutoFit/>
+          </a:bodyPr>
+          <a:lstStyle/>
+          <a:p>
+            <a:pPr>
+              <a:spcAft>
+                <a:spcPts val="300"/>
+              </a:spcAft>
+            </a:pPr>
+            <a:r>
+              <a:rPr sz="1900" b="1" i="0">
+                <a:solidFill>
+                  <a:srgbClr val="1A1A1A"/>
+                </a:solidFill>
+                <a:latin typeface="Arial"/>
+              </a:rPr>
+              <a:t>Duplicate registries</a:t>
+            </a:r>
+          </a:p>
+          <a:p>
+            <a:pPr>
+              <a:spcAft>
+                <a:spcPts val="300"/>
+              </a:spcAft>
+            </a:pPr>
+            <a:r>
+              <a:rPr sz="1550" b="0" i="0">
+                <a:solidFill>
+                  <a:srgbClr val="595959"/>
+                </a:solidFill>
+                <a:latin typeface="Arial"/>
+              </a:rPr>
+              <a:t>Three learner lists where there should be one.</a:t>
+            </a:r>
+          </a:p>
+        </p:txBody>
+      </p:sp>
+      <p:sp>
+        <p:nvSpPr>
+          <p:cNvPr id="6" name="Rectangle 5"/>
+          <p:cNvSpPr/>
+          <p:nvPr/>
+        </p:nvSpPr>
+        <p:spPr>
+          <a:xfrm>
+            <a:off x="621792" y="2622042"/>
+            <a:ext cx="10881360" cy="12700"/>
+          </a:xfrm>
+          <a:prstGeom prst="rect">
+            <a:avLst/>
+          </a:prstGeom>
+          <a:solidFill>
+            <a:srgbClr val="DDECF4"/>
+          </a:solidFill>
+          <a:ln>
+            <a:noFill/>
+          </a:ln>
+          <a:effectLst/>
+        </p:spPr>
+        <p:style>
+          <a:lnRef idx="1">
+            <a:schemeClr val="accent1"/>
+          </a:lnRef>
+          <a:fillRef idx="3">
+            <a:schemeClr val="accent1"/>
+          </a:fillRef>
+          <a:effectRef idx="2">
+            <a:schemeClr val="accent1"/>
+          </a:effectRef>
+          <a:fontRef idx="minor">
+            <a:schemeClr val="lt1"/>
+          </a:fontRef>
+        </p:style>
+        <p:txBody>
+          <a:bodyPr rtlCol="0" anchor="ctr"/>
+          <a:lstStyle/>
+          <a:p>
+            <a:pPr algn="ctr"/>
+          </a:p>
+        </p:txBody>
+      </p:sp>
+      <p:sp>
+        <p:nvSpPr>
+          <p:cNvPr id="7" name="Oval 6"/>
+          <p:cNvSpPr/>
+          <p:nvPr/>
+        </p:nvSpPr>
+        <p:spPr>
+          <a:xfrm>
+            <a:off x="621792" y="2708910"/>
+            <a:ext cx="310896" cy="310896"/>
+          </a:xfrm>
+          <a:prstGeom prst="ellipse">
+            <a:avLst/>
+          </a:prstGeom>
+          <a:solidFill>
+            <a:srgbClr val="009CD6"/>
+          </a:solidFill>
+          <a:ln>
+            <a:noFill/>
+          </a:ln>
+          <a:effectLst/>
+        </p:spPr>
+        <p:style>
+          <a:lnRef idx="1">
+            <a:schemeClr val="accent1"/>
+          </a:lnRef>
+          <a:fillRef idx="3">
+            <a:schemeClr val="accent1"/>
+          </a:fillRef>
+          <a:effectRef idx="2">
+            <a:schemeClr val="accent1"/>
+          </a:effectRef>
+          <a:fontRef idx="minor">
+            <a:schemeClr val="lt1"/>
+          </a:fontRef>
+        </p:style>
+        <p:txBody>
+          <a:bodyPr rtlCol="0" anchor="ctr" lIns="0" rIns="0" tIns="0" bIns="0" wrap="square"/>
+          <a:lstStyle/>
+          <a:p>
+            <a:pPr algn="ctr"/>
+            <a:r>
+              <a:rPr sz="1300" b="1" i="0">
+                <a:solidFill>
+                  <a:srgbClr val="FFFFFF"/>
+                </a:solidFill>
+                <a:latin typeface="Arial"/>
+              </a:rPr>
+              <a:t>2</a:t>
+            </a:r>
+          </a:p>
+        </p:txBody>
+      </p:sp>
+      <p:sp>
+        <p:nvSpPr>
+          <p:cNvPr id="8" name="TextBox 7"/>
+          <p:cNvSpPr txBox="1"/>
+          <p:nvPr/>
+        </p:nvSpPr>
+        <p:spPr>
+          <a:xfrm>
+            <a:off x="1115568" y="2663190"/>
+            <a:ext cx="10527487" cy="1154430"/>
+          </a:xfrm>
+          <a:prstGeom prst="rect">
+            <a:avLst/>
+          </a:prstGeom>
+          <a:noFill/>
+        </p:spPr>
+        <p:txBody>
+          <a:bodyPr wrap="square">
+            <a:spAutoFit/>
+          </a:bodyPr>
+          <a:lstStyle/>
+          <a:p>
+            <a:pPr>
+              <a:spcAft>
+                <a:spcPts val="300"/>
+              </a:spcAft>
+            </a:pPr>
+            <a:r>
+              <a:rPr sz="1900" b="1" i="0">
+                <a:solidFill>
+                  <a:srgbClr val="1A1A1A"/>
+                </a:solidFill>
+                <a:latin typeface="Arial"/>
+              </a:rPr>
+              <a:t>Identity not consumed</a:t>
+            </a:r>
+          </a:p>
+          <a:p>
+            <a:pPr>
+              <a:spcAft>
+                <a:spcPts val="300"/>
+              </a:spcAft>
+            </a:pPr>
+            <a:r>
+              <a:rPr sz="1550" b="0" i="0">
+                <a:solidFill>
+                  <a:srgbClr val="595959"/>
+                </a:solidFill>
+                <a:latin typeface="Arial"/>
+              </a:rPr>
+              <a:t>Education re-enters identity on paper instead of using PNIA.</a:t>
+            </a:r>
+          </a:p>
+        </p:txBody>
+      </p:sp>
+      <p:sp>
+        <p:nvSpPr>
+          <p:cNvPr id="9" name="Rectangle 8"/>
+          <p:cNvSpPr/>
+          <p:nvPr/>
+        </p:nvSpPr>
+        <p:spPr>
+          <a:xfrm>
+            <a:off x="621792" y="3822191"/>
+            <a:ext cx="10881360" cy="12700"/>
+          </a:xfrm>
+          <a:prstGeom prst="rect">
+            <a:avLst/>
+          </a:prstGeom>
+          <a:solidFill>
+            <a:srgbClr val="DDECF4"/>
+          </a:solidFill>
+          <a:ln>
+            <a:noFill/>
+          </a:ln>
+          <a:effectLst/>
+        </p:spPr>
+        <p:style>
+          <a:lnRef idx="1">
+            <a:schemeClr val="accent1"/>
+          </a:lnRef>
+          <a:fillRef idx="3">
+            <a:schemeClr val="accent1"/>
+          </a:fillRef>
+          <a:effectRef idx="2">
+            <a:schemeClr val="accent1"/>
+          </a:effectRef>
+          <a:fontRef idx="minor">
+            <a:schemeClr val="lt1"/>
+          </a:fontRef>
+        </p:style>
+        <p:txBody>
+          <a:bodyPr rtlCol="0" anchor="ctr"/>
+          <a:lstStyle/>
+          <a:p>
+            <a:pPr algn="ctr"/>
+          </a:p>
+        </p:txBody>
+      </p:sp>
+      <p:sp>
+        <p:nvSpPr>
+          <p:cNvPr id="10" name="Oval 9"/>
+          <p:cNvSpPr/>
+          <p:nvPr/>
+        </p:nvSpPr>
+        <p:spPr>
+          <a:xfrm>
+            <a:off x="621792" y="3909059"/>
+            <a:ext cx="310896" cy="310896"/>
+          </a:xfrm>
+          <a:prstGeom prst="ellipse">
+            <a:avLst/>
+          </a:prstGeom>
+          <a:solidFill>
+            <a:srgbClr val="009CD6"/>
+          </a:solidFill>
+          <a:ln>
+            <a:noFill/>
+          </a:ln>
+          <a:effectLst/>
+        </p:spPr>
+        <p:style>
+          <a:lnRef idx="1">
+            <a:schemeClr val="accent1"/>
+          </a:lnRef>
+          <a:fillRef idx="3">
+            <a:schemeClr val="accent1"/>
+          </a:fillRef>
+          <a:effectRef idx="2">
+            <a:schemeClr val="accent1"/>
+          </a:effectRef>
+          <a:fontRef idx="minor">
+            <a:schemeClr val="lt1"/>
+          </a:fontRef>
+        </p:style>
+        <p:txBody>
+          <a:bodyPr rtlCol="0" anchor="ctr" lIns="0" rIns="0" tIns="0" bIns="0" wrap="square"/>
+          <a:lstStyle/>
+          <a:p>
+            <a:pPr algn="ctr"/>
+            <a:r>
+              <a:rPr sz="1300" b="1" i="0">
+                <a:solidFill>
+                  <a:srgbClr val="FFFFFF"/>
+                </a:solidFill>
+                <a:latin typeface="Arial"/>
+              </a:rPr>
+              <a:t>3</a:t>
+            </a:r>
+          </a:p>
+        </p:txBody>
+      </p:sp>
+      <p:sp>
+        <p:nvSpPr>
+          <p:cNvPr id="11" name="TextBox 10"/>
+          <p:cNvSpPr txBox="1"/>
+          <p:nvPr/>
+        </p:nvSpPr>
+        <p:spPr>
+          <a:xfrm>
+            <a:off x="1115568" y="3863339"/>
+            <a:ext cx="10527487" cy="1154430"/>
+          </a:xfrm>
+          <a:prstGeom prst="rect">
+            <a:avLst/>
+          </a:prstGeom>
+          <a:noFill/>
+        </p:spPr>
+        <p:txBody>
+          <a:bodyPr wrap="square">
+            <a:spAutoFit/>
+          </a:bodyPr>
+          <a:lstStyle/>
+          <a:p>
+            <a:pPr>
+              <a:spcAft>
+                <a:spcPts val="300"/>
+              </a:spcAft>
+            </a:pPr>
+            <a:r>
+              <a:rPr sz="1900" b="1" i="0">
+                <a:solidFill>
+                  <a:srgbClr val="1A1A1A"/>
+                </a:solidFill>
+                <a:latin typeface="Arial"/>
+              </a:rPr>
+              <a:t>No shared data exchange</a:t>
+            </a:r>
+          </a:p>
+          <a:p>
+            <a:pPr>
+              <a:spcAft>
+                <a:spcPts val="300"/>
+              </a:spcAft>
+            </a:pPr>
+            <a:r>
+              <a:rPr sz="1550" b="0" i="0">
+                <a:solidFill>
+                  <a:srgbClr val="595959"/>
+                </a:solidFill>
+                <a:latin typeface="Arial"/>
+              </a:rPr>
+              <a:t>Every link is a custom point-to-point connection or a paper form.</a:t>
+            </a:r>
+          </a:p>
+        </p:txBody>
+      </p:sp>
+      <p:sp>
+        <p:nvSpPr>
+          <p:cNvPr id="12" name="Rectangle 11"/>
+          <p:cNvSpPr/>
+          <p:nvPr/>
+        </p:nvSpPr>
+        <p:spPr>
+          <a:xfrm>
+            <a:off x="621792" y="5022342"/>
+            <a:ext cx="10881360" cy="12700"/>
+          </a:xfrm>
+          <a:prstGeom prst="rect">
+            <a:avLst/>
+          </a:prstGeom>
+          <a:solidFill>
+            <a:srgbClr val="DDECF4"/>
+          </a:solidFill>
+          <a:ln>
+            <a:noFill/>
+          </a:ln>
+          <a:effectLst/>
+        </p:spPr>
+        <p:style>
+          <a:lnRef idx="1">
+            <a:schemeClr val="accent1"/>
+          </a:lnRef>
+          <a:fillRef idx="3">
+            <a:schemeClr val="accent1"/>
+          </a:fillRef>
+          <a:effectRef idx="2">
+            <a:schemeClr val="accent1"/>
+          </a:effectRef>
+          <a:fontRef idx="minor">
+            <a:schemeClr val="lt1"/>
+          </a:fontRef>
+        </p:style>
+        <p:txBody>
+          <a:bodyPr rtlCol="0" anchor="ctr"/>
+          <a:lstStyle/>
+          <a:p>
+            <a:pPr algn="ctr"/>
+          </a:p>
+        </p:txBody>
+      </p:sp>
+      <p:sp>
+        <p:nvSpPr>
+          <p:cNvPr id="13" name="Oval 12"/>
+          <p:cNvSpPr/>
+          <p:nvPr/>
+        </p:nvSpPr>
+        <p:spPr>
+          <a:xfrm>
+            <a:off x="621792" y="5109209"/>
+            <a:ext cx="310896" cy="310896"/>
+          </a:xfrm>
+          <a:prstGeom prst="ellipse">
+            <a:avLst/>
+          </a:prstGeom>
+          <a:solidFill>
+            <a:srgbClr val="009CD6"/>
+          </a:solidFill>
+          <a:ln>
+            <a:noFill/>
+          </a:ln>
+          <a:effectLst/>
+        </p:spPr>
+        <p:style>
+          <a:lnRef idx="1">
+            <a:schemeClr val="accent1"/>
+          </a:lnRef>
+          <a:fillRef idx="3">
+            <a:schemeClr val="accent1"/>
+          </a:fillRef>
+          <a:effectRef idx="2">
+            <a:schemeClr val="accent1"/>
+          </a:effectRef>
+          <a:fontRef idx="minor">
+            <a:schemeClr val="lt1"/>
+          </a:fontRef>
+        </p:style>
+        <p:txBody>
+          <a:bodyPr rtlCol="0" anchor="ctr" lIns="0" rIns="0" tIns="0" bIns="0" wrap="square"/>
+          <a:lstStyle/>
+          <a:p>
+            <a:pPr algn="ctr"/>
+            <a:r>
+              <a:rPr sz="1300" b="1" i="0">
+                <a:solidFill>
+                  <a:srgbClr val="FFFFFF"/>
+                </a:solidFill>
+                <a:latin typeface="Arial"/>
+              </a:rPr>
+              <a:t>4</a:t>
+            </a:r>
+          </a:p>
+        </p:txBody>
+      </p:sp>
+      <p:sp>
+        <p:nvSpPr>
+          <p:cNvPr id="14" name="TextBox 13"/>
+          <p:cNvSpPr txBox="1"/>
+          <p:nvPr/>
+        </p:nvSpPr>
+        <p:spPr>
+          <a:xfrm>
+            <a:off x="1115568" y="5063490"/>
+            <a:ext cx="10527487" cy="1154430"/>
+          </a:xfrm>
+          <a:prstGeom prst="rect">
+            <a:avLst/>
+          </a:prstGeom>
+          <a:noFill/>
+        </p:spPr>
+        <p:txBody>
+          <a:bodyPr wrap="square">
+            <a:spAutoFit/>
+          </a:bodyPr>
+          <a:lstStyle/>
+          <a:p>
+            <a:pPr>
+              <a:spcAft>
+                <a:spcPts val="300"/>
+              </a:spcAft>
+            </a:pPr>
+            <a:r>
+              <a:rPr sz="1900" b="1" i="0">
+                <a:solidFill>
+                  <a:srgbClr val="1A1A1A"/>
+                </a:solidFill>
+                <a:latin typeface="Arial"/>
+              </a:rPr>
+              <a:t>No clear owner of the authoritative learner</a:t>
+            </a:r>
+          </a:p>
+          <a:p>
+            <a:pPr>
+              <a:spcAft>
+                <a:spcPts val="300"/>
+              </a:spcAft>
+            </a:pPr>
+            <a:r>
+              <a:rPr sz="1550" b="0" i="0">
+                <a:solidFill>
+                  <a:srgbClr val="595959"/>
+                </a:solidFill>
+                <a:latin typeface="Arial"/>
+              </a:rPr>
+              <a:t>Everyone uses “the learner”; nobody is accountable for the copy of record.</a:t>
+            </a:r>
+          </a:p>
+        </p:txBody>
+      </p:sp>
+      <p:sp>
+        <p:nvSpPr>
+          <p:cNvPr id="15" name="TextBox 14"/>
+          <p:cNvSpPr txBox="1"/>
+          <p:nvPr/>
+        </p:nvSpPr>
+        <p:spPr>
+          <a:xfrm>
+            <a:off x="457200" y="6473952"/>
+            <a:ext cx="7772400" cy="292608"/>
+          </a:xfrm>
+          <a:prstGeom prst="rect">
+            <a:avLst/>
+          </a:prstGeom>
+          <a:noFill/>
+        </p:spPr>
+        <p:txBody>
+          <a:bodyPr wrap="square">
+            <a:spAutoFit/>
+          </a:bodyPr>
+          <a:lstStyle/>
+          <a:p>
+            <a:r>
+              <a:rPr sz="900" b="0" i="0">
+                <a:solidFill>
+                  <a:srgbClr val="595959"/>
+                </a:solidFill>
+                <a:latin typeface="Arial"/>
+              </a:rPr>
+              <a:t>4.3 · Phase 2, Assess — find the gaps and rank them</a:t>
+            </a:r>
+          </a:p>
+        </p:txBody>
+      </p:sp>
+    </p:spTree>
+  </p:cSld>
+  <p:clrMapOvr>
+    <a:masterClrMapping/>
+  </p:clrMapOvr>
+</p:sld>
+</file>
+
+<file path=ppt/slides/slide23.xml><?xml version="1.0" encoding="utf-8"?>
+<p:sld xmlns:a="http://schemas.openxmlformats.org/drawingml/2006/main" xmlns:p="http://schemas.openxmlformats.org/presentationml/2006/main" xmlns:r="http://schemas.openxmlformats.org/officeDocument/2006/relationships">
+  <p:cSld>
+    <p:spTree>
+      <p:nvGrpSpPr>
+        <p:cNvPr id="1" name=""/>
+        <p:cNvGrpSpPr/>
+        <p:nvPr/>
+      </p:nvGrpSpPr>
+      <p:grpSpPr/>
+      <p:sp>
+        <p:nvSpPr>
+          <p:cNvPr id="2" name="Rectangle 1"/>
+          <p:cNvSpPr/>
+          <p:nvPr/>
+        </p:nvSpPr>
+        <p:spPr>
+          <a:xfrm>
+            <a:off x="457200" y="384048"/>
+            <a:ext cx="45720" cy="256032"/>
+          </a:xfrm>
+          <a:prstGeom prst="rect">
+            <a:avLst/>
+          </a:prstGeom>
+          <a:solidFill>
+            <a:srgbClr val="009CD6"/>
+          </a:solidFill>
+          <a:ln>
+            <a:noFill/>
+          </a:ln>
+          <a:effectLst/>
+        </p:spPr>
+        <p:style>
+          <a:lnRef idx="1">
+            <a:schemeClr val="accent1"/>
+          </a:lnRef>
+          <a:fillRef idx="3">
+            <a:schemeClr val="accent1"/>
+          </a:fillRef>
+          <a:effectRef idx="2">
+            <a:schemeClr val="accent1"/>
+          </a:effectRef>
+          <a:fontRef idx="minor">
+            <a:schemeClr val="lt1"/>
+          </a:fontRef>
+        </p:style>
+        <p:txBody>
+          <a:bodyPr rtlCol="0" anchor="ctr"/>
+          <a:lstStyle/>
+          <a:p>
+            <a:pPr algn="ctr"/>
+          </a:p>
+        </p:txBody>
+      </p:sp>
+      <p:sp>
+        <p:nvSpPr>
+          <p:cNvPr id="3" name="TextBox 2"/>
+          <p:cNvSpPr txBox="1"/>
+          <p:nvPr/>
+        </p:nvSpPr>
+        <p:spPr>
+          <a:xfrm>
+            <a:off x="621792" y="274320"/>
+            <a:ext cx="11247120" cy="914400"/>
+          </a:xfrm>
+          <a:prstGeom prst="rect">
+            <a:avLst/>
+          </a:prstGeom>
+          <a:noFill/>
+        </p:spPr>
+        <p:txBody>
+          <a:bodyPr wrap="square">
+            <a:spAutoFit/>
+          </a:bodyPr>
+          <a:lstStyle/>
+          <a:p>
+            <a:r>
+              <a:rPr sz="2800" b="1" i="0">
+                <a:solidFill>
+                  <a:srgbClr val="1A1A1A"/>
+                </a:solidFill>
+                <a:latin typeface="Arial"/>
+              </a:rPr>
+              <a:t>The duplicate learner registry tops the list — it hurts most and it can move</a:t>
+            </a:r>
+          </a:p>
+        </p:txBody>
+      </p:sp>
+      <p:sp>
+        <p:nvSpPr>
+          <p:cNvPr id="4" name="TextBox 3"/>
+          <p:cNvSpPr txBox="1"/>
+          <p:nvPr/>
+        </p:nvSpPr>
+        <p:spPr>
+          <a:xfrm>
+            <a:off x="658368" y="1600200"/>
+            <a:ext cx="10881360" cy="2651760"/>
+          </a:xfrm>
+          <a:prstGeom prst="rect">
+            <a:avLst/>
+          </a:prstGeom>
+          <a:noFill/>
+        </p:spPr>
+        <p:txBody>
+          <a:bodyPr wrap="square">
+            <a:spAutoFit/>
+          </a:bodyPr>
+          <a:lstStyle/>
+          <a:p>
+            <a:pPr>
+              <a:spcAft>
+                <a:spcPts val="1200"/>
+              </a:spcAft>
+            </a:pPr>
+            <a:r>
+              <a:rPr sz="2000" b="0" i="0">
+                <a:solidFill>
+                  <a:srgbClr val="1A1A1A"/>
+                </a:solidFill>
+                <a:latin typeface="Arial"/>
+              </a:rPr>
+              <a:t>Score each gap by how much it hurts and how hard it is to close. On Progressa the duplicate learner registry tops the list: it is the direct cause of the minister's stalled promise, it burdens every parent, and it is closable — make the Learner Registry authoritative and have the others consume it.</a:t>
+            </a:r>
+          </a:p>
+          <a:p>
+            <a:pPr>
+              <a:spcAft>
+                <a:spcPts val="1200"/>
+              </a:spcAft>
+            </a:pPr>
+            <a:r>
+              <a:rPr sz="2000" b="0" i="0">
+                <a:solidFill>
+                  <a:srgbClr val="1A1A1A"/>
+                </a:solidFill>
+                <a:latin typeface="Arial"/>
+              </a:rPr>
+              <a:t>The no-data-exchange gap is high impact but harder, so it sequences later.</a:t>
+            </a:r>
+          </a:p>
+        </p:txBody>
+      </p:sp>
+      <p:sp>
+        <p:nvSpPr>
+          <p:cNvPr id="5" name="Rounded Rectangle 4"/>
+          <p:cNvSpPr/>
+          <p:nvPr/>
+        </p:nvSpPr>
+        <p:spPr>
+          <a:xfrm>
+            <a:off x="658368" y="4434840"/>
+            <a:ext cx="10881360" cy="1325880"/>
+          </a:xfrm>
+          <a:prstGeom prst="roundRect">
+            <a:avLst>
+              <a:gd name="adj" fmla="val 4500"/>
+            </a:avLst>
+          </a:prstGeom>
+          <a:solidFill>
+            <a:srgbClr val="E5F5FB"/>
+          </a:solidFill>
+          <a:ln>
+            <a:noFill/>
+          </a:ln>
+          <a:effectLst/>
+        </p:spPr>
+        <p:style>
+          <a:lnRef idx="1">
+            <a:schemeClr val="accent1"/>
+          </a:lnRef>
+          <a:fillRef idx="3">
+            <a:schemeClr val="accent1"/>
+          </a:fillRef>
+          <a:effectRef idx="2">
+            <a:schemeClr val="accent1"/>
+          </a:effectRef>
+          <a:fontRef idx="minor">
+            <a:schemeClr val="lt1"/>
+          </a:fontRef>
+        </p:style>
+        <p:txBody>
+          <a:bodyPr rtlCol="0" anchor="ctr"/>
+          <a:lstStyle/>
+          <a:p>
+            <a:pPr algn="ctr"/>
+          </a:p>
+        </p:txBody>
+      </p:sp>
+      <p:sp>
+        <p:nvSpPr>
+          <p:cNvPr id="6" name="TextBox 5"/>
+          <p:cNvSpPr txBox="1"/>
+          <p:nvPr/>
+        </p:nvSpPr>
+        <p:spPr>
+          <a:xfrm>
+            <a:off x="859536" y="4626864"/>
+            <a:ext cx="10479024" cy="1051560"/>
+          </a:xfrm>
+          <a:prstGeom prst="rect">
+            <a:avLst/>
+          </a:prstGeom>
+          <a:noFill/>
+        </p:spPr>
+        <p:txBody>
+          <a:bodyPr wrap="square">
+            <a:spAutoFit/>
+          </a:bodyPr>
+          <a:lstStyle/>
+          <a:p>
+            <a:pPr>
+              <a:spcAft>
+                <a:spcPts val="700"/>
+              </a:spcAft>
+            </a:pPr>
+            <a:r>
+              <a:rPr sz="2300" b="1" i="0">
+                <a:solidFill>
+                  <a:srgbClr val="006E96"/>
+                </a:solidFill>
+                <a:latin typeface="Arial"/>
+              </a:rPr>
+              <a:t>Rank by impact where movement is possible.</a:t>
+            </a:r>
+          </a:p>
+        </p:txBody>
+      </p:sp>
+      <p:sp>
+        <p:nvSpPr>
+          <p:cNvPr id="7" name="TextBox 6"/>
+          <p:cNvSpPr txBox="1"/>
+          <p:nvPr/>
+        </p:nvSpPr>
+        <p:spPr>
+          <a:xfrm>
+            <a:off x="457200" y="6473952"/>
+            <a:ext cx="7772400" cy="292608"/>
+          </a:xfrm>
+          <a:prstGeom prst="rect">
+            <a:avLst/>
+          </a:prstGeom>
+          <a:noFill/>
+        </p:spPr>
+        <p:txBody>
+          <a:bodyPr wrap="square">
+            <a:spAutoFit/>
+          </a:bodyPr>
+          <a:lstStyle/>
+          <a:p>
+            <a:r>
+              <a:rPr sz="900" b="0" i="0">
+                <a:solidFill>
+                  <a:srgbClr val="595959"/>
+                </a:solidFill>
+                <a:latin typeface="Arial"/>
+              </a:rPr>
+              <a:t>4.3 · Phase 2, Assess — find the gaps and rank them</a:t>
+            </a:r>
+          </a:p>
+        </p:txBody>
+      </p:sp>
+    </p:spTree>
+  </p:cSld>
+  <p:clrMapOvr>
+    <a:masterClrMapping/>
+  </p:clrMapOvr>
+</p:sld>
+</file>
+
+<file path=ppt/slides/slide24.xml><?xml version="1.0" encoding="utf-8"?>
+<p:sld xmlns:a="http://schemas.openxmlformats.org/drawingml/2006/main" xmlns:p="http://schemas.openxmlformats.org/presentationml/2006/main" xmlns:r="http://schemas.openxmlformats.org/officeDocument/2006/relationships">
+  <p:cSld>
+    <p:spTree>
+      <p:nvGrpSpPr>
+        <p:cNvPr id="1" name=""/>
+        <p:cNvGrpSpPr/>
+        <p:nvPr/>
+      </p:nvGrpSpPr>
+      <p:grpSpPr/>
+      <p:sp>
+        <p:nvSpPr>
+          <p:cNvPr id="2" name="Rectangle 1"/>
+          <p:cNvSpPr/>
+          <p:nvPr/>
+        </p:nvSpPr>
+        <p:spPr>
+          <a:xfrm>
+            <a:off x="457200" y="384048"/>
+            <a:ext cx="45720" cy="256032"/>
+          </a:xfrm>
+          <a:prstGeom prst="rect">
+            <a:avLst/>
+          </a:prstGeom>
+          <a:solidFill>
+            <a:srgbClr val="009CD6"/>
+          </a:solidFill>
+          <a:ln>
+            <a:noFill/>
+          </a:ln>
+          <a:effectLst/>
+        </p:spPr>
+        <p:style>
+          <a:lnRef idx="1">
+            <a:schemeClr val="accent1"/>
+          </a:lnRef>
+          <a:fillRef idx="3">
+            <a:schemeClr val="accent1"/>
+          </a:fillRef>
+          <a:effectRef idx="2">
+            <a:schemeClr val="accent1"/>
+          </a:effectRef>
+          <a:fontRef idx="minor">
+            <a:schemeClr val="lt1"/>
+          </a:fontRef>
+        </p:style>
+        <p:txBody>
+          <a:bodyPr rtlCol="0" anchor="ctr"/>
+          <a:lstStyle/>
+          <a:p>
+            <a:pPr algn="ctr"/>
+          </a:p>
+        </p:txBody>
+      </p:sp>
+      <p:sp>
+        <p:nvSpPr>
+          <p:cNvPr id="3" name="TextBox 2"/>
+          <p:cNvSpPr txBox="1"/>
+          <p:nvPr/>
+        </p:nvSpPr>
+        <p:spPr>
+          <a:xfrm>
+            <a:off x="621792" y="274320"/>
+            <a:ext cx="11247120" cy="914400"/>
+          </a:xfrm>
+          <a:prstGeom prst="rect">
+            <a:avLst/>
+          </a:prstGeom>
+          <a:noFill/>
+        </p:spPr>
+        <p:txBody>
+          <a:bodyPr wrap="square">
+            <a:spAutoFit/>
+          </a:bodyPr>
+          <a:lstStyle/>
+          <a:p>
+            <a:r>
+              <a:rPr sz="2800" b="1" i="0">
+                <a:solidFill>
+                  <a:srgbClr val="1A1A1A"/>
+                </a:solidFill>
+                <a:latin typeface="Arial"/>
+              </a:rPr>
+              <a:t>Sign-off two carries an honesty test you can fail quietly</a:t>
+            </a:r>
+          </a:p>
+        </p:txBody>
+      </p:sp>
+      <p:sp>
+        <p:nvSpPr>
+          <p:cNvPr id="4" name="TextBox 3"/>
+          <p:cNvSpPr txBox="1"/>
+          <p:nvPr/>
+        </p:nvSpPr>
+        <p:spPr>
+          <a:xfrm>
+            <a:off x="658368" y="1600200"/>
+            <a:ext cx="10881360" cy="1965960"/>
+          </a:xfrm>
+          <a:prstGeom prst="rect">
+            <a:avLst/>
+          </a:prstGeom>
+          <a:noFill/>
+        </p:spPr>
+        <p:txBody>
+          <a:bodyPr wrap="square">
+            <a:spAutoFit/>
+          </a:bodyPr>
+          <a:lstStyle/>
+          <a:p>
+            <a:pPr>
+              <a:spcAft>
+                <a:spcPts val="1200"/>
+              </a:spcAft>
+            </a:pPr>
+            <a:r>
+              <a:rPr sz="2000" b="0" i="0">
+                <a:solidFill>
+                  <a:srgbClr val="1A1A1A"/>
+                </a:solidFill>
+                <a:latin typeface="Arial"/>
+              </a:rPr>
+              <a:t>On Progressa, one of the three learner lists is owned by a powerful programme that does not want to give it up.</a:t>
+            </a:r>
+          </a:p>
+          <a:p>
+            <a:pPr>
+              <a:spcAft>
+                <a:spcPts val="1200"/>
+              </a:spcAft>
+            </a:pPr>
+            <a:r>
+              <a:rPr sz="2000" b="0" i="0">
+                <a:solidFill>
+                  <a:srgbClr val="1A1A1A"/>
+                </a:solidFill>
+                <a:latin typeface="Arial"/>
+              </a:rPr>
+              <a:t>The gap analysis must reflect ground truth — including that one.</a:t>
+            </a:r>
+          </a:p>
+        </p:txBody>
+      </p:sp>
+      <p:sp>
+        <p:nvSpPr>
+          <p:cNvPr id="5" name="Rounded Rectangle 4"/>
+          <p:cNvSpPr/>
+          <p:nvPr/>
+        </p:nvSpPr>
+        <p:spPr>
+          <a:xfrm>
+            <a:off x="658368" y="3749039"/>
+            <a:ext cx="10881360" cy="1325880"/>
+          </a:xfrm>
+          <a:prstGeom prst="roundRect">
+            <a:avLst>
+              <a:gd name="adj" fmla="val 4500"/>
+            </a:avLst>
+          </a:prstGeom>
+          <a:solidFill>
+            <a:srgbClr val="E5F5FB"/>
+          </a:solidFill>
+          <a:ln>
+            <a:noFill/>
+          </a:ln>
+          <a:effectLst/>
+        </p:spPr>
+        <p:style>
+          <a:lnRef idx="1">
+            <a:schemeClr val="accent1"/>
+          </a:lnRef>
+          <a:fillRef idx="3">
+            <a:schemeClr val="accent1"/>
+          </a:fillRef>
+          <a:effectRef idx="2">
+            <a:schemeClr val="accent1"/>
+          </a:effectRef>
+          <a:fontRef idx="minor">
+            <a:schemeClr val="lt1"/>
+          </a:fontRef>
+        </p:style>
+        <p:txBody>
+          <a:bodyPr rtlCol="0" anchor="ctr"/>
+          <a:lstStyle/>
+          <a:p>
+            <a:pPr algn="ctr"/>
+          </a:p>
+        </p:txBody>
+      </p:sp>
+      <p:sp>
+        <p:nvSpPr>
+          <p:cNvPr id="6" name="TextBox 5"/>
+          <p:cNvSpPr txBox="1"/>
+          <p:nvPr/>
+        </p:nvSpPr>
+        <p:spPr>
+          <a:xfrm>
+            <a:off x="859536" y="3941063"/>
+            <a:ext cx="10479024" cy="1051560"/>
+          </a:xfrm>
+          <a:prstGeom prst="rect">
+            <a:avLst/>
+          </a:prstGeom>
+          <a:noFill/>
+        </p:spPr>
+        <p:txBody>
+          <a:bodyPr wrap="square">
+            <a:spAutoFit/>
+          </a:bodyPr>
+          <a:lstStyle/>
+          <a:p>
+            <a:pPr>
+              <a:spcAft>
+                <a:spcPts val="700"/>
+              </a:spcAft>
+            </a:pPr>
+            <a:r>
+              <a:rPr sz="2300" b="1" i="0">
+                <a:solidFill>
+                  <a:srgbClr val="006E96"/>
+                </a:solidFill>
+                <a:latin typeface="Arial"/>
+              </a:rPr>
+              <a:t>An assessment that softens that gap fails — quietly, a year later.</a:t>
+            </a:r>
+          </a:p>
+        </p:txBody>
+      </p:sp>
+      <p:sp>
+        <p:nvSpPr>
+          <p:cNvPr id="7" name="TextBox 6"/>
+          <p:cNvSpPr txBox="1"/>
+          <p:nvPr/>
+        </p:nvSpPr>
+        <p:spPr>
+          <a:xfrm>
+            <a:off x="457200" y="6473952"/>
+            <a:ext cx="7772400" cy="292608"/>
+          </a:xfrm>
+          <a:prstGeom prst="rect">
+            <a:avLst/>
+          </a:prstGeom>
+          <a:noFill/>
+        </p:spPr>
+        <p:txBody>
+          <a:bodyPr wrap="square">
+            <a:spAutoFit/>
+          </a:bodyPr>
+          <a:lstStyle/>
+          <a:p>
+            <a:r>
+              <a:rPr sz="900" b="0" i="0">
+                <a:solidFill>
+                  <a:srgbClr val="595959"/>
+                </a:solidFill>
+                <a:latin typeface="Arial"/>
+              </a:rPr>
+              <a:t>4.3 · Phase 2, Assess — find the gaps and rank them</a:t>
+            </a:r>
+          </a:p>
+        </p:txBody>
+      </p:sp>
+    </p:spTree>
+  </p:cSld>
+  <p:clrMapOvr>
+    <a:masterClrMapping/>
+  </p:clrMapOvr>
+</p:sld>
+</file>
+
+<file path=ppt/slides/slide25.xml><?xml version="1.0" encoding="utf-8"?>
+<p:sld xmlns:a="http://schemas.openxmlformats.org/drawingml/2006/main" xmlns:p="http://schemas.openxmlformats.org/presentationml/2006/main" xmlns:r="http://schemas.openxmlformats.org/officeDocument/2006/relationships">
+  <p:cSld>
+    <p:spTree>
+      <p:nvGrpSpPr>
+        <p:cNvPr id="1" name=""/>
+        <p:cNvGrpSpPr/>
+        <p:nvPr/>
+      </p:nvGrpSpPr>
+      <p:grpSpPr/>
+      <p:sp>
+        <p:nvSpPr>
           <p:cNvPr id="2" name="TextBox 1"/>
           <p:cNvSpPr txBox="1"/>
           <p:nvPr/>
@@ -14707,7 +14221,7 @@
 </p:sld>
 </file>
 
-<file path=ppt/slides/slide23.xml><?xml version="1.0" encoding="utf-8"?>
+<file path=ppt/slides/slide26.xml><?xml version="1.0" encoding="utf-8"?>
 <p:sld xmlns:a="http://schemas.openxmlformats.org/drawingml/2006/main" xmlns:p="http://schemas.openxmlformats.org/presentationml/2006/main" xmlns:r="http://schemas.openxmlformats.org/officeDocument/2006/relationships">
   <p:cSld>
     <p:spTree>

--- a/10-Knowledge-Products/KP1-GEA/videos/module_4/en/decks/KP1_M4_4.3_Deck_v0.2.pptx
+++ b/10-Knowledge-Products/KP1-GEA/videos/module_4/en/decks/KP1_M4_4.3_Deck_v0.2.pptx
@@ -1079,7 +1079,7 @@
           <a:lstStyle/>
           <a:p>
             <a:r>
-              <a:t>VO: Start by scoring Progressa's capabilities against PAERA-anchored standards. Register a learner: low maturity — three lists, none authoritative. Prove identity: medium — the Identity Authority exists but education does not consume it. Certify a result: high — the Examination Authority does this well. Share data across bodies: very low — almost everything is paper. A simple maturity score per capability turns a vague sense that things are bad into a picture of exactly where the sector is weak and where it is strong.</a:t>
+              <a:t>VO: Start by scoring Progressa's capabilities against the reference architecture's standards. Register a learner: low maturity — three lists, none authoritative. Prove identity: medium — the Identity Authority exists but education does not consume it. Certify a result: high — the Examination Authority does this well. Share data across bodies: very low — almost everything is paper. A simple maturity score per capability turns a vague sense that things are bad into a picture of exactly where the sector is weak and where it is strong.</a:t>
             </a:r>
           </a:p>
         </p:txBody>

--- a/10-Knowledge-Products/KP1-GEA/videos/module_4/en/decks/KP1_M4_4.3_Deck_v0.2.pptx
+++ b/10-Knowledge-Products/KP1-GEA/videos/module_4/en/decks/KP1_M4_4.3_Deck_v0.2.pptx
@@ -11777,7 +11777,7 @@
                 </a:solidFill>
                 <a:latin typeface="Arial"/>
               </a:rPr>
-              <a:t>~3 minutes · standalone video · voice-over on text slides</a:t>
+              <a:t>standalone video · voice-over on text slides</a:t>
             </a:r>
           </a:p>
         </p:txBody>

--- a/10-Knowledge-Products/KP1-GEA/videos/module_4/en/decks/KP1_M4_4.3_Deck_v0.2.pptx
+++ b/10-Knowledge-Products/KP1-GEA/videos/module_4/en/decks/KP1_M4_4.3_Deck_v0.2.pptx
@@ -11641,7 +11641,7 @@
                 </a:solidFill>
                 <a:latin typeface="Arial"/>
               </a:rPr>
-              <a:t>KP1 · MODULE 4 · VIDEO 4.3</a:t>
+              <a:t>MODULE 4 · VIDEO 4.3</a:t>
             </a:r>
           </a:p>
         </p:txBody>
